--- a/demo/spec-qa-workflow-dev-briefing.pptx
+++ b/demo/spec-qa-workflow-dev-briefing.pptx
@@ -5905,7 +5905,7 @@
                           <a:latin typeface="맑은 고딕"/>
                           <a:ea typeface="맑은 고딕"/>
                         </a:rPr>
-                        <a:t>화면 내 상태 머신(OPEN→…→RESOLVED)으로 이력 보존</a:t>
+                        <a:t>화면 내 단계별 흐름(미답변→…→해결됨)으로 이력 보존</a:t>
                       </a:r>
                     </a:p>
                   </a:txBody>
@@ -6790,7 +6790,7 @@
                 <a:latin typeface="맑은 고딕"/>
                 <a:ea typeface="맑은 고딕"/>
               </a:rPr>
-              <a:t>값 변경은 반드시 승인(설계사 최종확인 또는 건설팀 승인)을 거쳐야 제원 DB에 반영되며, 그 과정이 corrections 컬렉션에 자동으로 남아 이전 프로세스 대비 추적성이 크게 향상됨.</a:t>
+              <a:t>값 변경은 반드시 승인(설계사 최종확인 또는 건설팀 승인)을 거쳐야 제원 DB에 반영되며, 그 과정이 수정 이력에 자동으로 남아 이전 프로세스 대비 추적성이 크게 향상됨.</a:t>
             </a:r>
           </a:p>
         </p:txBody>
@@ -9382,7 +9382,7 @@
                 <a:latin typeface="맑은 고딕"/>
                 <a:ea typeface="맑은 고딕"/>
               </a:rPr>
-              <a:t>업무 가이드 — 플로우차트</a:t>
+              <a:t>업무 프로세스 — 질의응답 플로우차트</a:t>
             </a:r>
           </a:p>
         </p:txBody>
@@ -9468,7 +9468,7 @@
                 <a:latin typeface="맑은 고딕"/>
                 <a:ea typeface="맑은 고딕"/>
               </a:rPr>
-              <a:t>"업무 가이드" 탭의 처리 흐름 매뉴얼 구성</a:t>
+              <a:t>질의 등록부터 종결까지의 처리 흐름</a:t>
             </a:r>
           </a:p>
         </p:txBody>
@@ -9602,237 +9602,699 @@
       </p:sp>
       <p:sp>
         <p:nvSpPr>
-          <p:cNvPr id="9" name="TextBox 8"/>
-          <p:cNvSpPr txBox="1"/>
-          <p:nvPr/>
-        </p:nvSpPr>
-        <p:spPr>
-          <a:xfrm>
-            <a:off x="548640" y="1691640"/>
-            <a:ext cx="4437766" cy="256032"/>
-          </a:xfrm>
-          <a:prstGeom prst="rect">
-            <a:avLst/>
-          </a:prstGeom>
-          <a:noFill/>
-        </p:spPr>
-        <p:txBody>
-          <a:bodyPr wrap="square" anchor="t" lIns="0" rIns="0" tIns="0" bIns="0">
-            <a:spAutoFit/>
-          </a:bodyPr>
-          <a:lstStyle/>
-          <a:p>
-            <a:pPr algn="l"/>
-            <a:r>
-              <a:rPr sz="1450" b="1" i="0">
+          <p:cNvPr id="9" name="Rounded Rectangle 8"/>
+          <p:cNvSpPr/>
+          <p:nvPr/>
+        </p:nvSpPr>
+        <p:spPr>
+          <a:xfrm>
+            <a:off x="3351276" y="1773936"/>
+            <a:ext cx="4937760" cy="384048"/>
+          </a:xfrm>
+          <a:prstGeom prst="roundRect">
+            <a:avLst/>
+          </a:prstGeom>
+          <a:solidFill>
+            <a:srgbClr val="FFFFFF"/>
+          </a:solidFill>
+          <a:ln w="15875">
+            <a:solidFill>
+              <a:srgbClr val="132A46"/>
+            </a:solidFill>
+          </a:ln>
+          <a:effectLst/>
+        </p:spPr>
+        <p:style>
+          <a:lnRef idx="1">
+            <a:schemeClr val="accent1"/>
+          </a:lnRef>
+          <a:fillRef idx="3">
+            <a:schemeClr val="accent1"/>
+          </a:fillRef>
+          <a:effectRef idx="2">
+            <a:schemeClr val="accent1"/>
+          </a:effectRef>
+          <a:fontRef idx="minor">
+            <a:schemeClr val="lt1"/>
+          </a:fontRef>
+        </p:style>
+        <p:txBody>
+          <a:bodyPr rtlCol="0" anchor="ctr" wrap="square" lIns="36576" rIns="36576" tIns="18288" bIns="18288"/>
+          <a:lstStyle/>
+          <a:p>
+            <a:pPr algn="ctr">
+              <a:lnSpc>
+                <a:spcPct val="100000"/>
+              </a:lnSpc>
+            </a:pPr>
+            <a:r>
+              <a:rPr sz="950" b="1" i="0">
                 <a:solidFill>
                   <a:srgbClr val="1A1F29"/>
                 </a:solidFill>
                 <a:latin typeface="맑은 고딕"/>
                 <a:ea typeface="맑은 고딕"/>
               </a:rPr>
-              <a:t>■  플로우차트 개요</a:t>
-            </a:r>
-          </a:p>
-        </p:txBody>
-      </p:sp>
-      <p:sp>
-        <p:nvSpPr>
-          <p:cNvPr id="10" name="TextBox 9"/>
-          <p:cNvSpPr txBox="1"/>
-          <p:nvPr/>
-        </p:nvSpPr>
-        <p:spPr>
-          <a:xfrm>
-            <a:off x="548640" y="2011680"/>
-            <a:ext cx="4437766" cy="2651760"/>
-          </a:xfrm>
-          <a:prstGeom prst="rect">
-            <a:avLst/>
-          </a:prstGeom>
-          <a:noFill/>
-        </p:spPr>
-        <p:txBody>
-          <a:bodyPr wrap="square" lIns="0" rIns="0" tIns="0" bIns="0">
-            <a:spAutoFit/>
-          </a:bodyPr>
-          <a:lstStyle/>
-          <a:p>
-            <a:pPr algn="l">
+              <a:t>질의 등록</a:t>
+            </a:r>
+          </a:p>
+          <a:p>
+            <a:pPr algn="ctr">
               <a:lnSpc>
-                <a:spcPct val="112000"/>
+                <a:spcPct val="100000"/>
               </a:lnSpc>
-              <a:spcAft>
-                <a:spcPts val="500"/>
-              </a:spcAft>
             </a:pPr>
             <a:r>
-              <a:rPr sz="1150" b="0" i="0">
+              <a:rPr sz="950" b="1" i="0">
                 <a:solidFill>
                   <a:srgbClr val="1A1F29"/>
                 </a:solidFill>
                 <a:latin typeface="맑은 고딕"/>
                 <a:ea typeface="맑은 고딕"/>
               </a:rPr>
-              <a:t>-   "업무 가이드" 탭은 질의 1건이 등록되어 최종 DB 반영으로 종결되기까지 거치는 모든 경로를 플로우차트 한 장(들)에 담아 매뉴얼처럼 제공</a:t>
-            </a:r>
-          </a:p>
-          <a:p>
-            <a:pPr algn="l">
+              <a:t>(검증 규칙 위반 자동 감지 또는 설계사 직접 등록)</a:t>
+            </a:r>
+          </a:p>
+        </p:txBody>
+      </p:sp>
+      <p:sp>
+        <p:nvSpPr>
+          <p:cNvPr id="10" name="Diamond 9"/>
+          <p:cNvSpPr/>
+          <p:nvPr/>
+        </p:nvSpPr>
+        <p:spPr>
+          <a:xfrm>
+            <a:off x="4448556" y="2240280"/>
+            <a:ext cx="2743200" cy="914400"/>
+          </a:xfrm>
+          <a:prstGeom prst="diamond">
+            <a:avLst/>
+          </a:prstGeom>
+          <a:solidFill>
+            <a:srgbClr val="F4F6FA"/>
+          </a:solidFill>
+          <a:ln w="15875">
+            <a:solidFill>
+              <a:srgbClr val="132A46"/>
+            </a:solidFill>
+          </a:ln>
+          <a:effectLst/>
+        </p:spPr>
+        <p:style>
+          <a:lnRef idx="1">
+            <a:schemeClr val="accent1"/>
+          </a:lnRef>
+          <a:fillRef idx="3">
+            <a:schemeClr val="accent1"/>
+          </a:fillRef>
+          <a:effectRef idx="2">
+            <a:schemeClr val="accent1"/>
+          </a:effectRef>
+          <a:fontRef idx="minor">
+            <a:schemeClr val="lt1"/>
+          </a:fontRef>
+        </p:style>
+        <p:txBody>
+          <a:bodyPr rtlCol="0" anchor="ctr" wrap="square" lIns="36576" rIns="36576" tIns="18288" bIns="18288"/>
+          <a:lstStyle/>
+          <a:p>
+            <a:pPr algn="ctr">
               <a:lnSpc>
-                <a:spcPct val="112000"/>
+                <a:spcPct val="100000"/>
               </a:lnSpc>
-              <a:spcAft>
-                <a:spcPts val="500"/>
-              </a:spcAft>
             </a:pPr>
             <a:r>
-              <a:rPr sz="1150" b="0" i="0">
+              <a:rPr sz="1050" b="1" i="0">
                 <a:solidFill>
                   <a:srgbClr val="1A1F29"/>
                 </a:solidFill>
                 <a:latin typeface="맑은 고딕"/>
                 <a:ea typeface="맑은 고딕"/>
               </a:rPr>
-              <a:t>-   도형 색으로 처리 주체 구분 — 기술팀=청록 다이아몬드, 설계사=주황 다이아몬드, 진행 중 상태=회색 사각형, 종결 상태=초록 사각형</a:t>
-            </a:r>
-          </a:p>
-          <a:p>
-            <a:pPr algn="l">
+              <a:t>제원 DB 값</a:t>
+            </a:r>
+          </a:p>
+          <a:p>
+            <a:pPr algn="ctr">
               <a:lnSpc>
-                <a:spcPct val="112000"/>
+                <a:spcPct val="100000"/>
               </a:lnSpc>
-              <a:spcAft>
-                <a:spcPts val="500"/>
-              </a:spcAft>
             </a:pPr>
             <a:r>
-              <a:rPr sz="1150" b="0" i="0">
+              <a:rPr sz="1050" b="1" i="0">
                 <a:solidFill>
                   <a:srgbClr val="1A1F29"/>
                 </a:solidFill>
                 <a:latin typeface="맑은 고딕"/>
                 <a:ea typeface="맑은 고딕"/>
               </a:rPr>
-              <a:t>-   실선 화살표=다음 단계로 진행, 주황 점선 화살표=반려로 인한 재질의</a:t>
-            </a:r>
-          </a:p>
-          <a:p>
-            <a:pPr algn="l">
+              <a:t>변경 질의?</a:t>
+            </a:r>
+          </a:p>
+        </p:txBody>
+      </p:sp>
+      <p:sp>
+        <p:nvSpPr>
+          <p:cNvPr id="11" name="Rounded Rectangle 10"/>
+          <p:cNvSpPr/>
+          <p:nvPr/>
+        </p:nvSpPr>
+        <p:spPr>
+          <a:xfrm>
+            <a:off x="1325880" y="3017520"/>
+            <a:ext cx="2834640" cy="457200"/>
+          </a:xfrm>
+          <a:prstGeom prst="roundRect">
+            <a:avLst/>
+          </a:prstGeom>
+          <a:solidFill>
+            <a:srgbClr val="FFFFFF"/>
+          </a:solidFill>
+          <a:ln w="15875">
+            <a:solidFill>
+              <a:srgbClr val="132A46"/>
+            </a:solidFill>
+          </a:ln>
+          <a:effectLst/>
+        </p:spPr>
+        <p:style>
+          <a:lnRef idx="1">
+            <a:schemeClr val="accent1"/>
+          </a:lnRef>
+          <a:fillRef idx="3">
+            <a:schemeClr val="accent1"/>
+          </a:fillRef>
+          <a:effectRef idx="2">
+            <a:schemeClr val="accent1"/>
+          </a:effectRef>
+          <a:fontRef idx="minor">
+            <a:schemeClr val="lt1"/>
+          </a:fontRef>
+        </p:style>
+        <p:txBody>
+          <a:bodyPr rtlCol="0" anchor="ctr" wrap="square" lIns="36576" rIns="36576" tIns="18288" bIns="18288"/>
+          <a:lstStyle/>
+          <a:p>
+            <a:pPr algn="ctr">
               <a:lnSpc>
-                <a:spcPct val="112000"/>
+                <a:spcPct val="100000"/>
               </a:lnSpc>
-              <a:spcAft>
-                <a:spcPts val="500"/>
-              </a:spcAft>
             </a:pPr>
             <a:r>
-              <a:rPr sz="1150" b="0" i="0">
+              <a:rPr sz="950" b="1" i="0">
                 <a:solidFill>
                   <a:srgbClr val="1A1F29"/>
                 </a:solidFill>
                 <a:latin typeface="맑은 고딕"/>
                 <a:ea typeface="맑은 고딕"/>
               </a:rPr>
-              <a:t>-   관리자만 도형 문구 · 단계별 설명(①~⑨)을 편집 가능 — 도형 배치와 연결(어느 상태에서 어느 상태로 가는지)은 실제 상태 머신과 동기화되어 고정</a:t>
-            </a:r>
-          </a:p>
-        </p:txBody>
-      </p:sp>
-      <p:sp>
-        <p:nvSpPr>
-          <p:cNvPr id="11" name="Rectangle 10"/>
-          <p:cNvSpPr/>
-          <p:nvPr/>
-        </p:nvSpPr>
-        <p:spPr>
-          <a:xfrm>
-            <a:off x="548640" y="4754880"/>
-            <a:ext cx="4437766" cy="1517904"/>
-          </a:xfrm>
-          <a:prstGeom prst="rect">
-            <a:avLst/>
-          </a:prstGeom>
-          <a:solidFill>
-            <a:srgbClr val="F4F6FA"/>
-          </a:solidFill>
-          <a:ln w="12700">
-            <a:solidFill>
-              <a:srgbClr val="DEE5EE"/>
-            </a:solidFill>
-          </a:ln>
-          <a:effectLst/>
-        </p:spPr>
-        <p:style>
-          <a:lnRef idx="1">
-            <a:schemeClr val="accent1"/>
-          </a:lnRef>
-          <a:fillRef idx="3">
-            <a:schemeClr val="accent1"/>
-          </a:fillRef>
-          <a:effectRef idx="2">
-            <a:schemeClr val="accent1"/>
-          </a:effectRef>
-          <a:fontRef idx="minor">
-            <a:schemeClr val="lt1"/>
-          </a:fontRef>
-        </p:style>
-        <p:txBody>
-          <a:bodyPr rtlCol="0" anchor="ctr" wrap="square" lIns="109728" rIns="109728" tIns="73152" bIns="73152"/>
-          <a:lstStyle/>
-          <a:p>
-            <a:pPr algn="ctr"/>
-            <a:r>
-              <a:rPr sz="1200" b="1" i="0">
+              <a:t>기술팀 확인 · 값 제안</a:t>
+            </a:r>
+          </a:p>
+          <a:p>
+            <a:pPr algn="ctr">
+              <a:lnSpc>
+                <a:spcPct val="100000"/>
+              </a:lnSpc>
+            </a:pPr>
+            <a:r>
+              <a:rPr sz="950" b="1" i="0">
                 <a:solidFill>
                   <a:srgbClr val="1A1F29"/>
                 </a:solidFill>
                 <a:latin typeface="맑은 고딕"/>
                 <a:ea typeface="맑은 고딕"/>
               </a:rPr>
-              <a:t>■  단계별 설명 (①~⑨)</a:t>
-            </a:r>
-          </a:p>
-          <a:p>
-            <a:pPr>
+              <a:t>(AS-IS 유지 또는 새 값 제안)</a:t>
+            </a:r>
+          </a:p>
+        </p:txBody>
+      </p:sp>
+      <p:sp>
+        <p:nvSpPr>
+          <p:cNvPr id="12" name="Rounded Rectangle 11"/>
+          <p:cNvSpPr/>
+          <p:nvPr/>
+        </p:nvSpPr>
+        <p:spPr>
+          <a:xfrm>
+            <a:off x="1325880" y="3776472"/>
+            <a:ext cx="2834640" cy="402336"/>
+          </a:xfrm>
+          <a:prstGeom prst="roundRect">
+            <a:avLst/>
+          </a:prstGeom>
+          <a:solidFill>
+            <a:srgbClr val="FFFFFF"/>
+          </a:solidFill>
+          <a:ln w="15875">
+            <a:solidFill>
+              <a:srgbClr val="132A46"/>
+            </a:solidFill>
+          </a:ln>
+          <a:effectLst/>
+        </p:spPr>
+        <p:style>
+          <a:lnRef idx="1">
+            <a:schemeClr val="accent1"/>
+          </a:lnRef>
+          <a:fillRef idx="3">
+            <a:schemeClr val="accent1"/>
+          </a:fillRef>
+          <a:effectRef idx="2">
+            <a:schemeClr val="accent1"/>
+          </a:effectRef>
+          <a:fontRef idx="minor">
+            <a:schemeClr val="lt1"/>
+          </a:fontRef>
+        </p:style>
+        <p:txBody>
+          <a:bodyPr rtlCol="0" anchor="ctr" wrap="square" lIns="36576" rIns="36576" tIns="18288" bIns="18288"/>
+          <a:lstStyle/>
+          <a:p>
+            <a:pPr algn="ctr">
               <a:lnSpc>
-                <a:spcPct val="110000"/>
+                <a:spcPct val="100000"/>
               </a:lnSpc>
-              <a:spcBef>
-                <a:spcPts val="400"/>
-              </a:spcBef>
             </a:pPr>
             <a:r>
-              <a:rPr sz="1050" b="0" i="0">
+              <a:rPr sz="950" b="1" i="0">
                 <a:solidFill>
                   <a:srgbClr val="1A1F29"/>
                 </a:solidFill>
                 <a:latin typeface="맑은 고딕"/>
                 <a:ea typeface="맑은 고딕"/>
               </a:rPr>
-              <a:t>흐름도 아래에는 번호(①~⑨)에 맞춘 단계별 설명(누가 · 무엇을 · 어떤 조건에서 하는지, 게이팅 규칙 포함)이 함께 실려 있다. 각 상태 박스 문구는 "질의응답" 탭에서 실제로 보이는 상태 칩(미답변/값 제안됨/답변완료/해결됨) 문구와 그대로 대응되어, 화면에서 본 칩이 흐름도의 어느 단계인지 바로 찾을 수 있다.</a:t>
+              <a:t>값 제안됨</a:t>
+            </a:r>
+          </a:p>
+          <a:p>
+            <a:pPr algn="ctr">
+              <a:lnSpc>
+                <a:spcPct val="100000"/>
+              </a:lnSpc>
+            </a:pPr>
+            <a:r>
+              <a:rPr sz="950" b="1" i="0">
+                <a:solidFill>
+                  <a:srgbClr val="1A1F29"/>
+                </a:solidFill>
+                <a:latin typeface="맑은 고딕"/>
+                <a:ea typeface="맑은 고딕"/>
+              </a:rPr>
+              <a:t>(설계사 최종승인 대기)</a:t>
+            </a:r>
+          </a:p>
+        </p:txBody>
+      </p:sp>
+      <p:sp>
+        <p:nvSpPr>
+          <p:cNvPr id="13" name="Diamond 12"/>
+          <p:cNvSpPr/>
+          <p:nvPr/>
+        </p:nvSpPr>
+        <p:spPr>
+          <a:xfrm>
+            <a:off x="1554480" y="4297679"/>
+            <a:ext cx="2377440" cy="731520"/>
+          </a:xfrm>
+          <a:prstGeom prst="diamond">
+            <a:avLst/>
+          </a:prstGeom>
+          <a:solidFill>
+            <a:srgbClr val="F4F6FA"/>
+          </a:solidFill>
+          <a:ln w="15875">
+            <a:solidFill>
+              <a:srgbClr val="132A46"/>
+            </a:solidFill>
+          </a:ln>
+          <a:effectLst/>
+        </p:spPr>
+        <p:style>
+          <a:lnRef idx="1">
+            <a:schemeClr val="accent1"/>
+          </a:lnRef>
+          <a:fillRef idx="3">
+            <a:schemeClr val="accent1"/>
+          </a:fillRef>
+          <a:effectRef idx="2">
+            <a:schemeClr val="accent1"/>
+          </a:effectRef>
+          <a:fontRef idx="minor">
+            <a:schemeClr val="lt1"/>
+          </a:fontRef>
+        </p:style>
+        <p:txBody>
+          <a:bodyPr rtlCol="0" anchor="ctr" wrap="square" lIns="36576" rIns="36576" tIns="18288" bIns="18288"/>
+          <a:lstStyle/>
+          <a:p>
+            <a:pPr algn="ctr">
+              <a:lnSpc>
+                <a:spcPct val="100000"/>
+              </a:lnSpc>
+            </a:pPr>
+            <a:r>
+              <a:rPr sz="1000" b="1" i="0">
+                <a:solidFill>
+                  <a:srgbClr val="1A1F29"/>
+                </a:solidFill>
+                <a:latin typeface="맑은 고딕"/>
+                <a:ea typeface="맑은 고딕"/>
+              </a:rPr>
+              <a:t>설계사</a:t>
+            </a:r>
+          </a:p>
+          <a:p>
+            <a:pPr algn="ctr">
+              <a:lnSpc>
+                <a:spcPct val="100000"/>
+              </a:lnSpc>
+            </a:pPr>
+            <a:r>
+              <a:rPr sz="1000" b="1" i="0">
+                <a:solidFill>
+                  <a:srgbClr val="1A1F29"/>
+                </a:solidFill>
+                <a:latin typeface="맑은 고딕"/>
+                <a:ea typeface="맑은 고딕"/>
+              </a:rPr>
+              <a:t>최종확인?</a:t>
+            </a:r>
+          </a:p>
+        </p:txBody>
+      </p:sp>
+      <p:sp>
+        <p:nvSpPr>
+          <p:cNvPr id="14" name="Rounded Rectangle 13"/>
+          <p:cNvSpPr/>
+          <p:nvPr/>
+        </p:nvSpPr>
+        <p:spPr>
+          <a:xfrm>
+            <a:off x="1325880" y="5321807"/>
+            <a:ext cx="2834640" cy="420624"/>
+          </a:xfrm>
+          <a:prstGeom prst="roundRect">
+            <a:avLst/>
+          </a:prstGeom>
+          <a:solidFill>
+            <a:srgbClr val="132A46"/>
+          </a:solidFill>
+          <a:ln w="15875">
+            <a:solidFill>
+              <a:srgbClr val="132A46"/>
+            </a:solidFill>
+          </a:ln>
+          <a:effectLst/>
+        </p:spPr>
+        <p:style>
+          <a:lnRef idx="1">
+            <a:schemeClr val="accent1"/>
+          </a:lnRef>
+          <a:fillRef idx="3">
+            <a:schemeClr val="accent1"/>
+          </a:fillRef>
+          <a:effectRef idx="2">
+            <a:schemeClr val="accent1"/>
+          </a:effectRef>
+          <a:fontRef idx="minor">
+            <a:schemeClr val="lt1"/>
+          </a:fontRef>
+        </p:style>
+        <p:txBody>
+          <a:bodyPr rtlCol="0" anchor="ctr" wrap="square" lIns="36576" rIns="36576" tIns="18288" bIns="18288"/>
+          <a:lstStyle/>
+          <a:p>
+            <a:pPr algn="ctr">
+              <a:lnSpc>
+                <a:spcPct val="100000"/>
+              </a:lnSpc>
+            </a:pPr>
+            <a:r>
+              <a:rPr sz="950" b="1" i="0">
+                <a:solidFill>
+                  <a:srgbClr val="FFFFFF"/>
+                </a:solidFill>
+                <a:latin typeface="맑은 고딕"/>
+                <a:ea typeface="맑은 고딕"/>
+              </a:rPr>
+              <a:t>해결됨</a:t>
+            </a:r>
+          </a:p>
+          <a:p>
+            <a:pPr algn="ctr">
+              <a:lnSpc>
+                <a:spcPct val="100000"/>
+              </a:lnSpc>
+            </a:pPr>
+            <a:r>
+              <a:rPr sz="950" b="1" i="0">
+                <a:solidFill>
+                  <a:srgbClr val="FFFFFF"/>
+                </a:solidFill>
+                <a:latin typeface="맑은 고딕"/>
+                <a:ea typeface="맑은 고딕"/>
+              </a:rPr>
+              <a:t>(제원 DB 반영 · 수정이력 기록)</a:t>
+            </a:r>
+          </a:p>
+        </p:txBody>
+      </p:sp>
+      <p:sp>
+        <p:nvSpPr>
+          <p:cNvPr id="15" name="Rounded Rectangle 14"/>
+          <p:cNvSpPr/>
+          <p:nvPr/>
+        </p:nvSpPr>
+        <p:spPr>
+          <a:xfrm>
+            <a:off x="7635240" y="3017520"/>
+            <a:ext cx="2834640" cy="457200"/>
+          </a:xfrm>
+          <a:prstGeom prst="roundRect">
+            <a:avLst/>
+          </a:prstGeom>
+          <a:solidFill>
+            <a:srgbClr val="FFFFFF"/>
+          </a:solidFill>
+          <a:ln w="15875">
+            <a:solidFill>
+              <a:srgbClr val="132A46"/>
+            </a:solidFill>
+          </a:ln>
+          <a:effectLst/>
+        </p:spPr>
+        <p:style>
+          <a:lnRef idx="1">
+            <a:schemeClr val="accent1"/>
+          </a:lnRef>
+          <a:fillRef idx="3">
+            <a:schemeClr val="accent1"/>
+          </a:fillRef>
+          <a:effectRef idx="2">
+            <a:schemeClr val="accent1"/>
+          </a:effectRef>
+          <a:fontRef idx="minor">
+            <a:schemeClr val="lt1"/>
+          </a:fontRef>
+        </p:style>
+        <p:txBody>
+          <a:bodyPr rtlCol="0" anchor="ctr" wrap="square" lIns="36576" rIns="36576" tIns="18288" bIns="18288"/>
+          <a:lstStyle/>
+          <a:p>
+            <a:pPr algn="ctr">
+              <a:lnSpc>
+                <a:spcPct val="100000"/>
+              </a:lnSpc>
+            </a:pPr>
+            <a:r>
+              <a:rPr sz="950" b="1" i="0">
+                <a:solidFill>
+                  <a:srgbClr val="1A1F29"/>
+                </a:solidFill>
+                <a:latin typeface="맑은 고딕"/>
+                <a:ea typeface="맑은 고딕"/>
+              </a:rPr>
+              <a:t>기술팀 서술형 답변 등록</a:t>
+            </a:r>
+          </a:p>
+        </p:txBody>
+      </p:sp>
+      <p:sp>
+        <p:nvSpPr>
+          <p:cNvPr id="16" name="Diamond 15"/>
+          <p:cNvSpPr/>
+          <p:nvPr/>
+        </p:nvSpPr>
+        <p:spPr>
+          <a:xfrm>
+            <a:off x="7863840" y="3657600"/>
+            <a:ext cx="2377440" cy="731520"/>
+          </a:xfrm>
+          <a:prstGeom prst="diamond">
+            <a:avLst/>
+          </a:prstGeom>
+          <a:solidFill>
+            <a:srgbClr val="F4F6FA"/>
+          </a:solidFill>
+          <a:ln w="15875">
+            <a:solidFill>
+              <a:srgbClr val="132A46"/>
+            </a:solidFill>
+          </a:ln>
+          <a:effectLst/>
+        </p:spPr>
+        <p:style>
+          <a:lnRef idx="1">
+            <a:schemeClr val="accent1"/>
+          </a:lnRef>
+          <a:fillRef idx="3">
+            <a:schemeClr val="accent1"/>
+          </a:fillRef>
+          <a:effectRef idx="2">
+            <a:schemeClr val="accent1"/>
+          </a:effectRef>
+          <a:fontRef idx="minor">
+            <a:schemeClr val="lt1"/>
+          </a:fontRef>
+        </p:style>
+        <p:txBody>
+          <a:bodyPr rtlCol="0" anchor="ctr" wrap="square" lIns="36576" rIns="36576" tIns="18288" bIns="18288"/>
+          <a:lstStyle/>
+          <a:p>
+            <a:pPr algn="ctr">
+              <a:lnSpc>
+                <a:spcPct val="100000"/>
+              </a:lnSpc>
+            </a:pPr>
+            <a:r>
+              <a:rPr sz="1000" b="1" i="0">
+                <a:solidFill>
+                  <a:srgbClr val="1A1F29"/>
+                </a:solidFill>
+                <a:latin typeface="맑은 고딕"/>
+                <a:ea typeface="맑은 고딕"/>
+              </a:rPr>
+              <a:t>설계사</a:t>
+            </a:r>
+          </a:p>
+          <a:p>
+            <a:pPr algn="ctr">
+              <a:lnSpc>
+                <a:spcPct val="100000"/>
+              </a:lnSpc>
+            </a:pPr>
+            <a:r>
+              <a:rPr sz="1000" b="1" i="0">
+                <a:solidFill>
+                  <a:srgbClr val="1A1F29"/>
+                </a:solidFill>
+                <a:latin typeface="맑은 고딕"/>
+                <a:ea typeface="맑은 고딕"/>
+              </a:rPr>
+              <a:t>최종검증?</a:t>
+            </a:r>
+          </a:p>
+        </p:txBody>
+      </p:sp>
+      <p:sp>
+        <p:nvSpPr>
+          <p:cNvPr id="17" name="Rounded Rectangle 16"/>
+          <p:cNvSpPr/>
+          <p:nvPr/>
+        </p:nvSpPr>
+        <p:spPr>
+          <a:xfrm>
+            <a:off x="7635240" y="4681727"/>
+            <a:ext cx="2834640" cy="420624"/>
+          </a:xfrm>
+          <a:prstGeom prst="roundRect">
+            <a:avLst/>
+          </a:prstGeom>
+          <a:solidFill>
+            <a:srgbClr val="132A46"/>
+          </a:solidFill>
+          <a:ln w="15875">
+            <a:solidFill>
+              <a:srgbClr val="132A46"/>
+            </a:solidFill>
+          </a:ln>
+          <a:effectLst/>
+        </p:spPr>
+        <p:style>
+          <a:lnRef idx="1">
+            <a:schemeClr val="accent1"/>
+          </a:lnRef>
+          <a:fillRef idx="3">
+            <a:schemeClr val="accent1"/>
+          </a:fillRef>
+          <a:effectRef idx="2">
+            <a:schemeClr val="accent1"/>
+          </a:effectRef>
+          <a:fontRef idx="minor">
+            <a:schemeClr val="lt1"/>
+          </a:fontRef>
+        </p:style>
+        <p:txBody>
+          <a:bodyPr rtlCol="0" anchor="ctr" wrap="square" lIns="36576" rIns="36576" tIns="18288" bIns="18288"/>
+          <a:lstStyle/>
+          <a:p>
+            <a:pPr algn="ctr">
+              <a:lnSpc>
+                <a:spcPct val="100000"/>
+              </a:lnSpc>
+            </a:pPr>
+            <a:r>
+              <a:rPr sz="950" b="1" i="0">
+                <a:solidFill>
+                  <a:srgbClr val="FFFFFF"/>
+                </a:solidFill>
+                <a:latin typeface="맑은 고딕"/>
+                <a:ea typeface="맑은 고딕"/>
+              </a:rPr>
+              <a:t>해결됨</a:t>
+            </a:r>
+          </a:p>
+          <a:p>
+            <a:pPr algn="ctr">
+              <a:lnSpc>
+                <a:spcPct val="100000"/>
+              </a:lnSpc>
+            </a:pPr>
+            <a:r>
+              <a:rPr sz="950" b="1" i="0">
+                <a:solidFill>
+                  <a:srgbClr val="FFFFFF"/>
+                </a:solidFill>
+                <a:latin typeface="맑은 고딕"/>
+                <a:ea typeface="맑은 고딕"/>
+              </a:rPr>
+              <a:t>(제원 DB 변경 없이 종결)</a:t>
             </a:r>
           </a:p>
         </p:txBody>
       </p:sp>
       <p:cxnSp>
         <p:nvCxnSpPr>
-          <p:cNvPr id="12" name="Connector 11"/>
+          <p:cNvPr id="18" name="Connector 17"/>
           <p:cNvCxnSpPr/>
           <p:nvPr/>
         </p:nvCxnSpPr>
         <p:spPr>
           <a:xfrm>
-            <a:off x="5123566" y="1691640"/>
-            <a:ext cx="0" cy="4581144"/>
+            <a:off x="5820156" y="2157984"/>
+            <a:ext cx="0" cy="82296"/>
           </a:xfrm>
           <a:prstGeom prst="line">
             <a:avLst/>
           </a:prstGeom>
-          <a:ln w="12700">
+          <a:ln w="15875">
             <a:solidFill>
-              <a:srgbClr val="DEE5EE"/>
+              <a:srgbClr val="132A46"/>
             </a:solidFill>
+            <a:tailEnd type="triangle" w="med" len="med"/>
           </a:ln>
         </p:spPr>
         <p:style>
@@ -9850,572 +10312,870 @@
           </a:fontRef>
         </p:style>
       </p:cxnSp>
-      <p:graphicFrame>
-        <p:nvGraphicFramePr>
-          <p:cNvPr id="13" name="Table 12"/>
-          <p:cNvGraphicFramePr>
-            <a:graphicFrameLocks noGrp="1"/>
-          </p:cNvGraphicFramePr>
-          <p:nvPr/>
-        </p:nvGraphicFramePr>
-        <p:xfrm>
-          <a:off x="5260726" y="1691640"/>
-          <a:ext cx="6382328" cy="4581141"/>
-        </p:xfrm>
-        <a:graphic>
-          <a:graphicData uri="http://schemas.openxmlformats.org/drawingml/2006/table">
-            <a:tbl>
-              <a:tblPr firstRow="1">
-                <a:tableStyleId>{5C22544A-7EE6-4342-B048-85BDC9FD1C3A}</a:tableStyleId>
-              </a:tblPr>
-              <a:tblGrid>
-                <a:gridCol w="1392508"/>
-                <a:gridCol w="1798656"/>
-                <a:gridCol w="3191164"/>
-              </a:tblGrid>
-              <a:tr h="365760">
-                <a:tc>
-                  <a:txBody>
-                    <a:bodyPr wrap="square"/>
-                    <a:lstStyle/>
-                    <a:p>
-                      <a:pPr algn="l"/>
-                      <a:r>
-                        <a:rPr sz="1150" b="1" i="0">
-                          <a:solidFill>
-                            <a:srgbClr val="FFFFFF"/>
-                          </a:solidFill>
-                          <a:latin typeface="맑은 고딕"/>
-                          <a:ea typeface="맑은 고딕"/>
-                        </a:rPr>
-                        <a:t>흐름도</a:t>
-                      </a:r>
-                    </a:p>
-                  </a:txBody>
-                  <a:tcPr anchor="ctr" marL="73152" marR="73152" marT="27432" marB="27432">
-                    <a:solidFill>
-                      <a:srgbClr val="132A46"/>
-                    </a:solidFill>
-                    <a:lnL w="6350" cap="flat">
-                      <a:solidFill>
-                        <a:srgbClr val="DEE5EE"/>
-                      </a:solidFill>
-                    </a:lnL>
-                    <a:lnR w="6350" cap="flat">
-                      <a:solidFill>
-                        <a:srgbClr val="DEE5EE"/>
-                      </a:solidFill>
-                    </a:lnR>
-                    <a:lnT w="6350" cap="flat">
-                      <a:solidFill>
-                        <a:srgbClr val="DEE5EE"/>
-                      </a:solidFill>
-                    </a:lnT>
-                    <a:lnB w="6350" cap="flat">
-                      <a:solidFill>
-                        <a:srgbClr val="DEE5EE"/>
-                      </a:solidFill>
-                    </a:lnB>
-                  </a:tcPr>
-                </a:tc>
-                <a:tc>
-                  <a:txBody>
-                    <a:bodyPr wrap="square"/>
-                    <a:lstStyle/>
-                    <a:p>
-                      <a:pPr algn="l"/>
-                      <a:r>
-                        <a:rPr sz="1150" b="1" i="0">
-                          <a:solidFill>
-                            <a:srgbClr val="FFFFFF"/>
-                          </a:solidFill>
-                          <a:latin typeface="맑은 고딕"/>
-                          <a:ea typeface="맑은 고딕"/>
-                        </a:rPr>
-                        <a:t>대상</a:t>
-                      </a:r>
-                    </a:p>
-                  </a:txBody>
-                  <a:tcPr anchor="ctr" marL="73152" marR="73152" marT="27432" marB="27432">
-                    <a:solidFill>
-                      <a:srgbClr val="132A46"/>
-                    </a:solidFill>
-                    <a:lnL w="6350" cap="flat">
-                      <a:solidFill>
-                        <a:srgbClr val="DEE5EE"/>
-                      </a:solidFill>
-                    </a:lnL>
-                    <a:lnR w="6350" cap="flat">
-                      <a:solidFill>
-                        <a:srgbClr val="DEE5EE"/>
-                      </a:solidFill>
-                    </a:lnR>
-                    <a:lnT w="6350" cap="flat">
-                      <a:solidFill>
-                        <a:srgbClr val="DEE5EE"/>
-                      </a:solidFill>
-                    </a:lnT>
-                    <a:lnB w="6350" cap="flat">
-                      <a:solidFill>
-                        <a:srgbClr val="DEE5EE"/>
-                      </a:solidFill>
-                    </a:lnB>
-                  </a:tcPr>
-                </a:tc>
-                <a:tc>
-                  <a:txBody>
-                    <a:bodyPr wrap="square"/>
-                    <a:lstStyle/>
-                    <a:p>
-                      <a:pPr algn="l"/>
-                      <a:r>
-                        <a:rPr sz="1150" b="1" i="0">
-                          <a:solidFill>
-                            <a:srgbClr val="FFFFFF"/>
-                          </a:solidFill>
-                          <a:latin typeface="맑은 고딕"/>
-                          <a:ea typeface="맑은 고딕"/>
-                        </a:rPr>
-                        <a:t>핵심 경로</a:t>
-                      </a:r>
-                    </a:p>
-                  </a:txBody>
-                  <a:tcPr anchor="ctr" marL="73152" marR="73152" marT="27432" marB="27432">
-                    <a:solidFill>
-                      <a:srgbClr val="132A46"/>
-                    </a:solidFill>
-                    <a:lnL w="6350" cap="flat">
-                      <a:solidFill>
-                        <a:srgbClr val="DEE5EE"/>
-                      </a:solidFill>
-                    </a:lnL>
-                    <a:lnR w="6350" cap="flat">
-                      <a:solidFill>
-                        <a:srgbClr val="DEE5EE"/>
-                      </a:solidFill>
-                    </a:lnR>
-                    <a:lnT w="6350" cap="flat">
-                      <a:solidFill>
-                        <a:srgbClr val="DEE5EE"/>
-                      </a:solidFill>
-                    </a:lnT>
-                    <a:lnB w="6350" cap="flat">
-                      <a:solidFill>
-                        <a:srgbClr val="DEE5EE"/>
-                      </a:solidFill>
-                    </a:lnB>
-                  </a:tcPr>
-                </a:tc>
-              </a:tr>
-              <a:tr h="1405127">
-                <a:tc>
-                  <a:txBody>
-                    <a:bodyPr wrap="square"/>
-                    <a:lstStyle/>
-                    <a:p>
-                      <a:pPr algn="l"/>
-                      <a:r>
-                        <a:rPr sz="950" b="1" i="0">
-                          <a:solidFill>
-                            <a:srgbClr val="1A1F29"/>
-                          </a:solidFill>
-                          <a:latin typeface="맑은 고딕"/>
-                          <a:ea typeface="맑은 고딕"/>
-                        </a:rPr>
-                        <a:t>buildFlowSvg
-(SPEC 질의)</a:t>
-                      </a:r>
-                    </a:p>
-                  </a:txBody>
-                  <a:tcPr anchor="ctr" marL="73152" marR="73152" marT="27432" marB="27432">
-                    <a:solidFill>
-                      <a:srgbClr val="FFFFFF"/>
-                    </a:solidFill>
-                    <a:lnL w="6350" cap="flat">
-                      <a:solidFill>
-                        <a:srgbClr val="DEE5EE"/>
-                      </a:solidFill>
-                    </a:lnL>
-                    <a:lnR w="6350" cap="flat">
-                      <a:solidFill>
-                        <a:srgbClr val="DEE5EE"/>
-                      </a:solidFill>
-                    </a:lnR>
-                    <a:lnT w="6350" cap="flat">
-                      <a:solidFill>
-                        <a:srgbClr val="DEE5EE"/>
-                      </a:solidFill>
-                    </a:lnT>
-                    <a:lnB w="6350" cap="flat">
-                      <a:solidFill>
-                        <a:srgbClr val="DEE5EE"/>
-                      </a:solidFill>
-                    </a:lnB>
-                  </a:tcPr>
-                </a:tc>
-                <a:tc>
-                  <a:txBody>
-                    <a:bodyPr wrap="square"/>
-                    <a:lstStyle/>
-                    <a:p>
-                      <a:pPr algn="l"/>
-                      <a:r>
-                        <a:rPr sz="950" b="0" i="0">
-                          <a:solidFill>
-                            <a:srgbClr val="1A1F29"/>
-                          </a:solidFill>
-                          <a:latin typeface="맑은 고딕"/>
-                          <a:ea typeface="맑은 고딕"/>
-                        </a:rPr>
-                        <a:t>제원 DB 값을 바꾸는 AUTO/MANUAL 질의</a:t>
-                      </a:r>
-                    </a:p>
-                  </a:txBody>
-                  <a:tcPr anchor="ctr" marL="73152" marR="73152" marT="27432" marB="27432">
-                    <a:solidFill>
-                      <a:srgbClr val="FFFFFF"/>
-                    </a:solidFill>
-                    <a:lnL w="6350" cap="flat">
-                      <a:solidFill>
-                        <a:srgbClr val="DEE5EE"/>
-                      </a:solidFill>
-                    </a:lnL>
-                    <a:lnR w="6350" cap="flat">
-                      <a:solidFill>
-                        <a:srgbClr val="DEE5EE"/>
-                      </a:solidFill>
-                    </a:lnR>
-                    <a:lnT w="6350" cap="flat">
-                      <a:solidFill>
-                        <a:srgbClr val="DEE5EE"/>
-                      </a:solidFill>
-                    </a:lnT>
-                    <a:lnB w="6350" cap="flat">
-                      <a:solidFill>
-                        <a:srgbClr val="DEE5EE"/>
-                      </a:solidFill>
-                    </a:lnB>
-                  </a:tcPr>
-                </a:tc>
-                <a:tc>
-                  <a:txBody>
-                    <a:bodyPr wrap="square"/>
-                    <a:lstStyle/>
-                    <a:p>
-                      <a:pPr algn="l"/>
-                      <a:r>
-                        <a:rPr sz="950" b="0" i="0">
-                          <a:solidFill>
-                            <a:srgbClr val="1A1F29"/>
-                          </a:solidFill>
-                          <a:latin typeface="맑은 고딕"/>
-                          <a:ea typeface="맑은 고딕"/>
-                        </a:rPr>
-                        <a:t>①AUTO 생성 → 기술팀 확인(특이없음→③즉시 해결) 또는 곧장 값 제안(④) → ⑤값 제안됨 → 설계사 최종확인 → ⑥해결됨(반려 시 ④로 재질의)</a:t>
-                      </a:r>
-                    </a:p>
-                  </a:txBody>
-                  <a:tcPr anchor="ctr" marL="73152" marR="73152" marT="27432" marB="27432">
-                    <a:solidFill>
-                      <a:srgbClr val="FFFFFF"/>
-                    </a:solidFill>
-                    <a:lnL w="6350" cap="flat">
-                      <a:solidFill>
-                        <a:srgbClr val="DEE5EE"/>
-                      </a:solidFill>
-                    </a:lnL>
-                    <a:lnR w="6350" cap="flat">
-                      <a:solidFill>
-                        <a:srgbClr val="DEE5EE"/>
-                      </a:solidFill>
-                    </a:lnR>
-                    <a:lnT w="6350" cap="flat">
-                      <a:solidFill>
-                        <a:srgbClr val="DEE5EE"/>
-                      </a:solidFill>
-                    </a:lnT>
-                    <a:lnB w="6350" cap="flat">
-                      <a:solidFill>
-                        <a:srgbClr val="DEE5EE"/>
-                      </a:solidFill>
-                    </a:lnB>
-                  </a:tcPr>
-                </a:tc>
-              </a:tr>
-              <a:tr h="1405127">
-                <a:tc>
-                  <a:txBody>
-                    <a:bodyPr wrap="square"/>
-                    <a:lstStyle/>
-                    <a:p>
-                      <a:pPr algn="l"/>
-                      <a:r>
-                        <a:rPr sz="950" b="1" i="0">
-                          <a:solidFill>
-                            <a:srgbClr val="1A1F29"/>
-                          </a:solidFill>
-                          <a:latin typeface="맑은 고딕"/>
-                          <a:ea typeface="맑은 고딕"/>
-                        </a:rPr>
-                        <a:t>buildNonSpecFlowSvg
-(일반 질의)</a:t>
-                      </a:r>
-                    </a:p>
-                  </a:txBody>
-                  <a:tcPr anchor="ctr" marL="73152" marR="73152" marT="27432" marB="27432">
-                    <a:solidFill>
-                      <a:srgbClr val="FFFFFF"/>
-                    </a:solidFill>
-                    <a:lnL w="6350" cap="flat">
-                      <a:solidFill>
-                        <a:srgbClr val="DEE5EE"/>
-                      </a:solidFill>
-                    </a:lnL>
-                    <a:lnR w="6350" cap="flat">
-                      <a:solidFill>
-                        <a:srgbClr val="DEE5EE"/>
-                      </a:solidFill>
-                    </a:lnR>
-                    <a:lnT w="6350" cap="flat">
-                      <a:solidFill>
-                        <a:srgbClr val="DEE5EE"/>
-                      </a:solidFill>
-                    </a:lnT>
-                    <a:lnB w="6350" cap="flat">
-                      <a:solidFill>
-                        <a:srgbClr val="DEE5EE"/>
-                      </a:solidFill>
-                    </a:lnB>
-                  </a:tcPr>
-                </a:tc>
-                <a:tc>
-                  <a:txBody>
-                    <a:bodyPr wrap="square"/>
-                    <a:lstStyle/>
-                    <a:p>
-                      <a:pPr algn="l"/>
-                      <a:r>
-                        <a:rPr sz="950" b="0" i="0">
-                          <a:solidFill>
-                            <a:srgbClr val="1A1F29"/>
-                          </a:solidFill>
-                          <a:latin typeface="맑은 고딕"/>
-                          <a:ea typeface="맑은 고딕"/>
-                        </a:rPr>
-                        <a:t>제원 DB와 무관한 일반 문의(NON_SPEC)</a:t>
-                      </a:r>
-                    </a:p>
-                  </a:txBody>
-                  <a:tcPr anchor="ctr" marL="73152" marR="73152" marT="27432" marB="27432">
-                    <a:solidFill>
-                      <a:srgbClr val="FFFFFF"/>
-                    </a:solidFill>
-                    <a:lnL w="6350" cap="flat">
-                      <a:solidFill>
-                        <a:srgbClr val="DEE5EE"/>
-                      </a:solidFill>
-                    </a:lnL>
-                    <a:lnR w="6350" cap="flat">
-                      <a:solidFill>
-                        <a:srgbClr val="DEE5EE"/>
-                      </a:solidFill>
-                    </a:lnR>
-                    <a:lnT w="6350" cap="flat">
-                      <a:solidFill>
-                        <a:srgbClr val="DEE5EE"/>
-                      </a:solidFill>
-                    </a:lnT>
-                    <a:lnB w="6350" cap="flat">
-                      <a:solidFill>
-                        <a:srgbClr val="DEE5EE"/>
-                      </a:solidFill>
-                    </a:lnB>
-                  </a:tcPr>
-                </a:tc>
-                <a:tc>
-                  <a:txBody>
-                    <a:bodyPr wrap="square"/>
-                    <a:lstStyle/>
-                    <a:p>
-                      <a:pPr algn="l"/>
-                      <a:r>
-                        <a:rPr sz="950" b="0" i="0">
-                          <a:solidFill>
-                            <a:srgbClr val="1A1F29"/>
-                          </a:solidFill>
-                          <a:latin typeface="맑은 고딕"/>
-                          <a:ea typeface="맑은 고딕"/>
-                        </a:rPr>
-                        <a:t>Ⓝ①등록 → Ⓝ②기술팀 서술형 답변 → 설계사 최종검증 → Ⓝ③해결됨(이상 있으면 Ⓝ②로 재질의)</a:t>
-                      </a:r>
-                    </a:p>
-                  </a:txBody>
-                  <a:tcPr anchor="ctr" marL="73152" marR="73152" marT="27432" marB="27432">
-                    <a:solidFill>
-                      <a:srgbClr val="FFFFFF"/>
-                    </a:solidFill>
-                    <a:lnL w="6350" cap="flat">
-                      <a:solidFill>
-                        <a:srgbClr val="DEE5EE"/>
-                      </a:solidFill>
-                    </a:lnL>
-                    <a:lnR w="6350" cap="flat">
-                      <a:solidFill>
-                        <a:srgbClr val="DEE5EE"/>
-                      </a:solidFill>
-                    </a:lnR>
-                    <a:lnT w="6350" cap="flat">
-                      <a:solidFill>
-                        <a:srgbClr val="DEE5EE"/>
-                      </a:solidFill>
-                    </a:lnT>
-                    <a:lnB w="6350" cap="flat">
-                      <a:solidFill>
-                        <a:srgbClr val="DEE5EE"/>
-                      </a:solidFill>
-                    </a:lnB>
-                  </a:tcPr>
-                </a:tc>
-              </a:tr>
-              <a:tr h="1405127">
-                <a:tc>
-                  <a:txBody>
-                    <a:bodyPr wrap="square"/>
-                    <a:lstStyle/>
-                    <a:p>
-                      <a:pPr algn="l"/>
-                      <a:r>
-                        <a:rPr sz="950" b="1" i="0">
-                          <a:solidFill>
-                            <a:srgbClr val="1A1F29"/>
-                          </a:solidFill>
-                          <a:latin typeface="맑은 고딕"/>
-                          <a:ea typeface="맑은 고딕"/>
-                        </a:rPr>
-                        <a:t>buildIntakeFlowSvg
-(제원 접수)</a:t>
-                      </a:r>
-                    </a:p>
-                  </a:txBody>
-                  <a:tcPr anchor="ctr" marL="73152" marR="73152" marT="27432" marB="27432">
-                    <a:solidFill>
-                      <a:srgbClr val="FFFFFF"/>
-                    </a:solidFill>
-                    <a:lnL w="6350" cap="flat">
-                      <a:solidFill>
-                        <a:srgbClr val="DEE5EE"/>
-                      </a:solidFill>
-                    </a:lnL>
-                    <a:lnR w="6350" cap="flat">
-                      <a:solidFill>
-                        <a:srgbClr val="DEE5EE"/>
-                      </a:solidFill>
-                    </a:lnR>
-                    <a:lnT w="6350" cap="flat">
-                      <a:solidFill>
-                        <a:srgbClr val="DEE5EE"/>
-                      </a:solidFill>
-                    </a:lnT>
-                    <a:lnB w="6350" cap="flat">
-                      <a:solidFill>
-                        <a:srgbClr val="DEE5EE"/>
-                      </a:solidFill>
-                    </a:lnB>
-                  </a:tcPr>
-                </a:tc>
-                <a:tc>
-                  <a:txBody>
-                    <a:bodyPr wrap="square"/>
-                    <a:lstStyle/>
-                    <a:p>
-                      <a:pPr algn="l"/>
-                      <a:r>
-                        <a:rPr sz="950" b="0" i="0">
-                          <a:solidFill>
-                            <a:srgbClr val="1A1F29"/>
-                          </a:solidFill>
-                          <a:latin typeface="맑은 고딕"/>
-                          <a:ea typeface="맑은 고딕"/>
-                        </a:rPr>
-                        <a:t>제원표가 DB에 최초로 채워지는 과정(부분접수 포함)</a:t>
-                      </a:r>
-                    </a:p>
-                  </a:txBody>
-                  <a:tcPr anchor="ctr" marL="73152" marR="73152" marT="27432" marB="27432">
-                    <a:solidFill>
-                      <a:srgbClr val="FFFFFF"/>
-                    </a:solidFill>
-                    <a:lnL w="6350" cap="flat">
-                      <a:solidFill>
-                        <a:srgbClr val="DEE5EE"/>
-                      </a:solidFill>
-                    </a:lnL>
-                    <a:lnR w="6350" cap="flat">
-                      <a:solidFill>
-                        <a:srgbClr val="DEE5EE"/>
-                      </a:solidFill>
-                    </a:lnR>
-                    <a:lnT w="6350" cap="flat">
-                      <a:solidFill>
-                        <a:srgbClr val="DEE5EE"/>
-                      </a:solidFill>
-                    </a:lnT>
-                    <a:lnB w="6350" cap="flat">
-                      <a:solidFill>
-                        <a:srgbClr val="DEE5EE"/>
-                      </a:solidFill>
-                    </a:lnB>
-                  </a:tcPr>
-                </a:tc>
-                <a:tc>
-                  <a:txBody>
-                    <a:bodyPr wrap="square"/>
-                    <a:lstStyle/>
-                    <a:p>
-                      <a:pPr algn="l"/>
-                      <a:r>
-                        <a:rPr sz="950" b="0" i="0">
-                          <a:solidFill>
-                            <a:srgbClr val="1A1F29"/>
-                          </a:solidFill>
-                          <a:latin typeface="맑은 고딕"/>
-                          <a:ea typeface="맑은 고딕"/>
-                        </a:rPr>
-                        <a:t>접수①도착 → 표준양식이면 접수②업로드 자동 반영, 아니면 접수③수기입력 → 접수③-A 건설팀 승인(반려 시 재작성) → 접수④DB 반영</a:t>
-                      </a:r>
-                    </a:p>
-                  </a:txBody>
-                  <a:tcPr anchor="ctr" marL="73152" marR="73152" marT="27432" marB="27432">
-                    <a:solidFill>
-                      <a:srgbClr val="FFFFFF"/>
-                    </a:solidFill>
-                    <a:lnL w="6350" cap="flat">
-                      <a:solidFill>
-                        <a:srgbClr val="DEE5EE"/>
-                      </a:solidFill>
-                    </a:lnL>
-                    <a:lnR w="6350" cap="flat">
-                      <a:solidFill>
-                        <a:srgbClr val="DEE5EE"/>
-                      </a:solidFill>
-                    </a:lnR>
-                    <a:lnT w="6350" cap="flat">
-                      <a:solidFill>
-                        <a:srgbClr val="DEE5EE"/>
-                      </a:solidFill>
-                    </a:lnT>
-                    <a:lnB w="6350" cap="flat">
-                      <a:solidFill>
-                        <a:srgbClr val="DEE5EE"/>
-                      </a:solidFill>
-                    </a:lnB>
-                  </a:tcPr>
-                </a:tc>
-              </a:tr>
-            </a:tbl>
-          </a:graphicData>
-        </a:graphic>
-      </p:graphicFrame>
+      <p:cxnSp>
+        <p:nvCxnSpPr>
+          <p:cNvPr id="19" name="Connector 18"/>
+          <p:cNvCxnSpPr/>
+          <p:nvPr/>
+        </p:nvCxnSpPr>
+        <p:spPr>
+          <a:xfrm flipH="1">
+            <a:off x="2743200" y="2697480"/>
+            <a:ext cx="1751076" cy="0"/>
+          </a:xfrm>
+          <a:prstGeom prst="line">
+            <a:avLst/>
+          </a:prstGeom>
+          <a:ln w="15875">
+            <a:solidFill>
+              <a:srgbClr val="132A46"/>
+            </a:solidFill>
+          </a:ln>
+        </p:spPr>
+        <p:style>
+          <a:lnRef idx="2">
+            <a:schemeClr val="accent1"/>
+          </a:lnRef>
+          <a:fillRef idx="0">
+            <a:schemeClr val="accent1"/>
+          </a:fillRef>
+          <a:effectRef idx="1">
+            <a:schemeClr val="accent1"/>
+          </a:effectRef>
+          <a:fontRef idx="minor">
+            <a:schemeClr val="tx1"/>
+          </a:fontRef>
+        </p:style>
+      </p:cxnSp>
+      <p:cxnSp>
+        <p:nvCxnSpPr>
+          <p:cNvPr id="20" name="Connector 19"/>
+          <p:cNvCxnSpPr/>
+          <p:nvPr/>
+        </p:nvCxnSpPr>
+        <p:spPr>
+          <a:xfrm>
+            <a:off x="2743200" y="2697480"/>
+            <a:ext cx="0" cy="320040"/>
+          </a:xfrm>
+          <a:prstGeom prst="line">
+            <a:avLst/>
+          </a:prstGeom>
+          <a:ln w="15875">
+            <a:solidFill>
+              <a:srgbClr val="132A46"/>
+            </a:solidFill>
+            <a:tailEnd type="triangle" w="med" len="med"/>
+          </a:ln>
+        </p:spPr>
+        <p:style>
+          <a:lnRef idx="2">
+            <a:schemeClr val="accent1"/>
+          </a:lnRef>
+          <a:fillRef idx="0">
+            <a:schemeClr val="accent1"/>
+          </a:fillRef>
+          <a:effectRef idx="1">
+            <a:schemeClr val="accent1"/>
+          </a:effectRef>
+          <a:fontRef idx="minor">
+            <a:schemeClr val="tx1"/>
+          </a:fontRef>
+        </p:style>
+      </p:cxnSp>
+      <p:cxnSp>
+        <p:nvCxnSpPr>
+          <p:cNvPr id="21" name="Connector 20"/>
+          <p:cNvCxnSpPr/>
+          <p:nvPr/>
+        </p:nvCxnSpPr>
+        <p:spPr>
+          <a:xfrm>
+            <a:off x="7146036" y="2697480"/>
+            <a:ext cx="1906524" cy="0"/>
+          </a:xfrm>
+          <a:prstGeom prst="line">
+            <a:avLst/>
+          </a:prstGeom>
+          <a:ln w="15875">
+            <a:solidFill>
+              <a:srgbClr val="132A46"/>
+            </a:solidFill>
+          </a:ln>
+        </p:spPr>
+        <p:style>
+          <a:lnRef idx="2">
+            <a:schemeClr val="accent1"/>
+          </a:lnRef>
+          <a:fillRef idx="0">
+            <a:schemeClr val="accent1"/>
+          </a:fillRef>
+          <a:effectRef idx="1">
+            <a:schemeClr val="accent1"/>
+          </a:effectRef>
+          <a:fontRef idx="minor">
+            <a:schemeClr val="tx1"/>
+          </a:fontRef>
+        </p:style>
+      </p:cxnSp>
+      <p:cxnSp>
+        <p:nvCxnSpPr>
+          <p:cNvPr id="22" name="Connector 21"/>
+          <p:cNvCxnSpPr/>
+          <p:nvPr/>
+        </p:nvCxnSpPr>
+        <p:spPr>
+          <a:xfrm>
+            <a:off x="9052560" y="2697480"/>
+            <a:ext cx="0" cy="320040"/>
+          </a:xfrm>
+          <a:prstGeom prst="line">
+            <a:avLst/>
+          </a:prstGeom>
+          <a:ln w="15875">
+            <a:solidFill>
+              <a:srgbClr val="132A46"/>
+            </a:solidFill>
+            <a:tailEnd type="triangle" w="med" len="med"/>
+          </a:ln>
+        </p:spPr>
+        <p:style>
+          <a:lnRef idx="2">
+            <a:schemeClr val="accent1"/>
+          </a:lnRef>
+          <a:fillRef idx="0">
+            <a:schemeClr val="accent1"/>
+          </a:fillRef>
+          <a:effectRef idx="1">
+            <a:schemeClr val="accent1"/>
+          </a:effectRef>
+          <a:fontRef idx="minor">
+            <a:schemeClr val="tx1"/>
+          </a:fontRef>
+        </p:style>
+      </p:cxnSp>
+      <p:cxnSp>
+        <p:nvCxnSpPr>
+          <p:cNvPr id="23" name="Connector 22"/>
+          <p:cNvCxnSpPr/>
+          <p:nvPr/>
+        </p:nvCxnSpPr>
+        <p:spPr>
+          <a:xfrm>
+            <a:off x="2743200" y="3474720"/>
+            <a:ext cx="0" cy="301752"/>
+          </a:xfrm>
+          <a:prstGeom prst="line">
+            <a:avLst/>
+          </a:prstGeom>
+          <a:ln w="15875">
+            <a:solidFill>
+              <a:srgbClr val="132A46"/>
+            </a:solidFill>
+            <a:tailEnd type="triangle" w="med" len="med"/>
+          </a:ln>
+        </p:spPr>
+        <p:style>
+          <a:lnRef idx="2">
+            <a:schemeClr val="accent1"/>
+          </a:lnRef>
+          <a:fillRef idx="0">
+            <a:schemeClr val="accent1"/>
+          </a:fillRef>
+          <a:effectRef idx="1">
+            <a:schemeClr val="accent1"/>
+          </a:effectRef>
+          <a:fontRef idx="minor">
+            <a:schemeClr val="tx1"/>
+          </a:fontRef>
+        </p:style>
+      </p:cxnSp>
+      <p:cxnSp>
+        <p:nvCxnSpPr>
+          <p:cNvPr id="24" name="Connector 23"/>
+          <p:cNvCxnSpPr/>
+          <p:nvPr/>
+        </p:nvCxnSpPr>
+        <p:spPr>
+          <a:xfrm>
+            <a:off x="2743200" y="4178808"/>
+            <a:ext cx="0" cy="118872"/>
+          </a:xfrm>
+          <a:prstGeom prst="line">
+            <a:avLst/>
+          </a:prstGeom>
+          <a:ln w="15875">
+            <a:solidFill>
+              <a:srgbClr val="132A46"/>
+            </a:solidFill>
+            <a:tailEnd type="triangle" w="med" len="med"/>
+          </a:ln>
+        </p:spPr>
+        <p:style>
+          <a:lnRef idx="2">
+            <a:schemeClr val="accent1"/>
+          </a:lnRef>
+          <a:fillRef idx="0">
+            <a:schemeClr val="accent1"/>
+          </a:fillRef>
+          <a:effectRef idx="1">
+            <a:schemeClr val="accent1"/>
+          </a:effectRef>
+          <a:fontRef idx="minor">
+            <a:schemeClr val="tx1"/>
+          </a:fontRef>
+        </p:style>
+      </p:cxnSp>
+      <p:cxnSp>
+        <p:nvCxnSpPr>
+          <p:cNvPr id="25" name="Connector 24"/>
+          <p:cNvCxnSpPr/>
+          <p:nvPr/>
+        </p:nvCxnSpPr>
+        <p:spPr>
+          <a:xfrm>
+            <a:off x="2743200" y="5029200"/>
+            <a:ext cx="0" cy="292608"/>
+          </a:xfrm>
+          <a:prstGeom prst="line">
+            <a:avLst/>
+          </a:prstGeom>
+          <a:ln w="15875">
+            <a:solidFill>
+              <a:srgbClr val="132A46"/>
+            </a:solidFill>
+            <a:tailEnd type="triangle" w="med" len="med"/>
+          </a:ln>
+        </p:spPr>
+        <p:style>
+          <a:lnRef idx="2">
+            <a:schemeClr val="accent1"/>
+          </a:lnRef>
+          <a:fillRef idx="0">
+            <a:schemeClr val="accent1"/>
+          </a:fillRef>
+          <a:effectRef idx="1">
+            <a:schemeClr val="accent1"/>
+          </a:effectRef>
+          <a:fontRef idx="minor">
+            <a:schemeClr val="tx1"/>
+          </a:fontRef>
+        </p:style>
+      </p:cxnSp>
+      <p:cxnSp>
+        <p:nvCxnSpPr>
+          <p:cNvPr id="26" name="Connector 25"/>
+          <p:cNvCxnSpPr/>
+          <p:nvPr/>
+        </p:nvCxnSpPr>
+        <p:spPr>
+          <a:xfrm>
+            <a:off x="9052560" y="3474720"/>
+            <a:ext cx="0" cy="182880"/>
+          </a:xfrm>
+          <a:prstGeom prst="line">
+            <a:avLst/>
+          </a:prstGeom>
+          <a:ln w="15875">
+            <a:solidFill>
+              <a:srgbClr val="132A46"/>
+            </a:solidFill>
+            <a:tailEnd type="triangle" w="med" len="med"/>
+          </a:ln>
+        </p:spPr>
+        <p:style>
+          <a:lnRef idx="2">
+            <a:schemeClr val="accent1"/>
+          </a:lnRef>
+          <a:fillRef idx="0">
+            <a:schemeClr val="accent1"/>
+          </a:fillRef>
+          <a:effectRef idx="1">
+            <a:schemeClr val="accent1"/>
+          </a:effectRef>
+          <a:fontRef idx="minor">
+            <a:schemeClr val="tx1"/>
+          </a:fontRef>
+        </p:style>
+      </p:cxnSp>
+      <p:cxnSp>
+        <p:nvCxnSpPr>
+          <p:cNvPr id="27" name="Connector 26"/>
+          <p:cNvCxnSpPr/>
+          <p:nvPr/>
+        </p:nvCxnSpPr>
+        <p:spPr>
+          <a:xfrm>
+            <a:off x="9052560" y="4389120"/>
+            <a:ext cx="0" cy="292608"/>
+          </a:xfrm>
+          <a:prstGeom prst="line">
+            <a:avLst/>
+          </a:prstGeom>
+          <a:ln w="15875">
+            <a:solidFill>
+              <a:srgbClr val="132A46"/>
+            </a:solidFill>
+            <a:tailEnd type="triangle" w="med" len="med"/>
+          </a:ln>
+        </p:spPr>
+        <p:style>
+          <a:lnRef idx="2">
+            <a:schemeClr val="accent1"/>
+          </a:lnRef>
+          <a:fillRef idx="0">
+            <a:schemeClr val="accent1"/>
+          </a:fillRef>
+          <a:effectRef idx="1">
+            <a:schemeClr val="accent1"/>
+          </a:effectRef>
+          <a:fontRef idx="minor">
+            <a:schemeClr val="tx1"/>
+          </a:fontRef>
+        </p:style>
+      </p:cxnSp>
+      <p:cxnSp>
+        <p:nvCxnSpPr>
+          <p:cNvPr id="28" name="Connector 27"/>
+          <p:cNvCxnSpPr/>
+          <p:nvPr/>
+        </p:nvCxnSpPr>
+        <p:spPr>
+          <a:xfrm flipH="1">
+            <a:off x="914400" y="4663440"/>
+            <a:ext cx="640080" cy="0"/>
+          </a:xfrm>
+          <a:prstGeom prst="line">
+            <a:avLst/>
+          </a:prstGeom>
+          <a:ln w="15875">
+            <a:solidFill>
+              <a:srgbClr val="132A46"/>
+            </a:solidFill>
+            <a:prstDash val="dash"/>
+          </a:ln>
+        </p:spPr>
+        <p:style>
+          <a:lnRef idx="2">
+            <a:schemeClr val="accent1"/>
+          </a:lnRef>
+          <a:fillRef idx="0">
+            <a:schemeClr val="accent1"/>
+          </a:fillRef>
+          <a:effectRef idx="1">
+            <a:schemeClr val="accent1"/>
+          </a:effectRef>
+          <a:fontRef idx="minor">
+            <a:schemeClr val="tx1"/>
+          </a:fontRef>
+        </p:style>
+      </p:cxnSp>
+      <p:cxnSp>
+        <p:nvCxnSpPr>
+          <p:cNvPr id="29" name="Connector 28"/>
+          <p:cNvCxnSpPr/>
+          <p:nvPr/>
+        </p:nvCxnSpPr>
+        <p:spPr>
+          <a:xfrm flipV="1">
+            <a:off x="914400" y="3246120"/>
+            <a:ext cx="0" cy="1417320"/>
+          </a:xfrm>
+          <a:prstGeom prst="line">
+            <a:avLst/>
+          </a:prstGeom>
+          <a:ln w="15875">
+            <a:solidFill>
+              <a:srgbClr val="132A46"/>
+            </a:solidFill>
+            <a:prstDash val="dash"/>
+          </a:ln>
+        </p:spPr>
+        <p:style>
+          <a:lnRef idx="2">
+            <a:schemeClr val="accent1"/>
+          </a:lnRef>
+          <a:fillRef idx="0">
+            <a:schemeClr val="accent1"/>
+          </a:fillRef>
+          <a:effectRef idx="1">
+            <a:schemeClr val="accent1"/>
+          </a:effectRef>
+          <a:fontRef idx="minor">
+            <a:schemeClr val="tx1"/>
+          </a:fontRef>
+        </p:style>
+      </p:cxnSp>
+      <p:cxnSp>
+        <p:nvCxnSpPr>
+          <p:cNvPr id="30" name="Connector 29"/>
+          <p:cNvCxnSpPr/>
+          <p:nvPr/>
+        </p:nvCxnSpPr>
+        <p:spPr>
+          <a:xfrm>
+            <a:off x="914400" y="3246120"/>
+            <a:ext cx="411480" cy="0"/>
+          </a:xfrm>
+          <a:prstGeom prst="line">
+            <a:avLst/>
+          </a:prstGeom>
+          <a:ln w="15875">
+            <a:solidFill>
+              <a:srgbClr val="132A46"/>
+            </a:solidFill>
+            <a:prstDash val="dash"/>
+            <a:tailEnd type="triangle" w="med" len="med"/>
+          </a:ln>
+        </p:spPr>
+        <p:style>
+          <a:lnRef idx="2">
+            <a:schemeClr val="accent1"/>
+          </a:lnRef>
+          <a:fillRef idx="0">
+            <a:schemeClr val="accent1"/>
+          </a:fillRef>
+          <a:effectRef idx="1">
+            <a:schemeClr val="accent1"/>
+          </a:effectRef>
+          <a:fontRef idx="minor">
+            <a:schemeClr val="tx1"/>
+          </a:fontRef>
+        </p:style>
+      </p:cxnSp>
+      <p:cxnSp>
+        <p:nvCxnSpPr>
+          <p:cNvPr id="31" name="Connector 30"/>
+          <p:cNvCxnSpPr/>
+          <p:nvPr/>
+        </p:nvCxnSpPr>
+        <p:spPr>
+          <a:xfrm>
+            <a:off x="10241280" y="4023360"/>
+            <a:ext cx="365760" cy="0"/>
+          </a:xfrm>
+          <a:prstGeom prst="line">
+            <a:avLst/>
+          </a:prstGeom>
+          <a:ln w="15875">
+            <a:solidFill>
+              <a:srgbClr val="132A46"/>
+            </a:solidFill>
+            <a:prstDash val="dash"/>
+          </a:ln>
+        </p:spPr>
+        <p:style>
+          <a:lnRef idx="2">
+            <a:schemeClr val="accent1"/>
+          </a:lnRef>
+          <a:fillRef idx="0">
+            <a:schemeClr val="accent1"/>
+          </a:fillRef>
+          <a:effectRef idx="1">
+            <a:schemeClr val="accent1"/>
+          </a:effectRef>
+          <a:fontRef idx="minor">
+            <a:schemeClr val="tx1"/>
+          </a:fontRef>
+        </p:style>
+      </p:cxnSp>
+      <p:cxnSp>
+        <p:nvCxnSpPr>
+          <p:cNvPr id="32" name="Connector 31"/>
+          <p:cNvCxnSpPr/>
+          <p:nvPr/>
+        </p:nvCxnSpPr>
+        <p:spPr>
+          <a:xfrm flipV="1">
+            <a:off x="10607040" y="3246120"/>
+            <a:ext cx="0" cy="777240"/>
+          </a:xfrm>
+          <a:prstGeom prst="line">
+            <a:avLst/>
+          </a:prstGeom>
+          <a:ln w="15875">
+            <a:solidFill>
+              <a:srgbClr val="132A46"/>
+            </a:solidFill>
+            <a:prstDash val="dash"/>
+          </a:ln>
+        </p:spPr>
+        <p:style>
+          <a:lnRef idx="2">
+            <a:schemeClr val="accent1"/>
+          </a:lnRef>
+          <a:fillRef idx="0">
+            <a:schemeClr val="accent1"/>
+          </a:fillRef>
+          <a:effectRef idx="1">
+            <a:schemeClr val="accent1"/>
+          </a:effectRef>
+          <a:fontRef idx="minor">
+            <a:schemeClr val="tx1"/>
+          </a:fontRef>
+        </p:style>
+      </p:cxnSp>
+      <p:cxnSp>
+        <p:nvCxnSpPr>
+          <p:cNvPr id="33" name="Connector 32"/>
+          <p:cNvCxnSpPr/>
+          <p:nvPr/>
+        </p:nvCxnSpPr>
+        <p:spPr>
+          <a:xfrm flipH="1">
+            <a:off x="10469880" y="3246120"/>
+            <a:ext cx="137160" cy="0"/>
+          </a:xfrm>
+          <a:prstGeom prst="line">
+            <a:avLst/>
+          </a:prstGeom>
+          <a:ln w="15875">
+            <a:solidFill>
+              <a:srgbClr val="132A46"/>
+            </a:solidFill>
+            <a:prstDash val="dash"/>
+            <a:tailEnd type="triangle" w="med" len="med"/>
+          </a:ln>
+        </p:spPr>
+        <p:style>
+          <a:lnRef idx="2">
+            <a:schemeClr val="accent1"/>
+          </a:lnRef>
+          <a:fillRef idx="0">
+            <a:schemeClr val="accent1"/>
+          </a:fillRef>
+          <a:effectRef idx="1">
+            <a:schemeClr val="accent1"/>
+          </a:effectRef>
+          <a:fontRef idx="minor">
+            <a:schemeClr val="tx1"/>
+          </a:fontRef>
+        </p:style>
+      </p:cxnSp>
+      <p:sp>
+        <p:nvSpPr>
+          <p:cNvPr id="34" name="Rectangle 33"/>
+          <p:cNvSpPr/>
+          <p:nvPr/>
+        </p:nvSpPr>
+        <p:spPr>
+          <a:xfrm>
+            <a:off x="3154679" y="2432303"/>
+            <a:ext cx="822960" cy="219456"/>
+          </a:xfrm>
+          <a:prstGeom prst="rect">
+            <a:avLst/>
+          </a:prstGeom>
+          <a:solidFill>
+            <a:srgbClr val="FFFFFF"/>
+          </a:solidFill>
+          <a:ln>
+            <a:noFill/>
+          </a:ln>
+          <a:effectLst/>
+        </p:spPr>
+        <p:style>
+          <a:lnRef idx="1">
+            <a:schemeClr val="accent1"/>
+          </a:lnRef>
+          <a:fillRef idx="3">
+            <a:schemeClr val="accent1"/>
+          </a:fillRef>
+          <a:effectRef idx="2">
+            <a:schemeClr val="accent1"/>
+          </a:effectRef>
+          <a:fontRef idx="minor">
+            <a:schemeClr val="lt1"/>
+          </a:fontRef>
+        </p:style>
+        <p:txBody>
+          <a:bodyPr rtlCol="0" anchor="ctr" lIns="0" rIns="0" tIns="0" bIns="0"/>
+          <a:lstStyle/>
+          <a:p>
+            <a:pPr algn="ctr"/>
+            <a:r>
+              <a:rPr sz="900" b="1" i="0">
+                <a:solidFill>
+                  <a:srgbClr val="1A1F29"/>
+                </a:solidFill>
+                <a:latin typeface="맑은 고딕"/>
+                <a:ea typeface="맑은 고딕"/>
+              </a:rPr>
+              <a:t>예</a:t>
+            </a:r>
+          </a:p>
+        </p:txBody>
+      </p:sp>
+      <p:sp>
+        <p:nvSpPr>
+          <p:cNvPr id="35" name="Rectangle 34"/>
+          <p:cNvSpPr/>
+          <p:nvPr/>
+        </p:nvSpPr>
+        <p:spPr>
+          <a:xfrm>
+            <a:off x="7726680" y="2432303"/>
+            <a:ext cx="822960" cy="219456"/>
+          </a:xfrm>
+          <a:prstGeom prst="rect">
+            <a:avLst/>
+          </a:prstGeom>
+          <a:solidFill>
+            <a:srgbClr val="FFFFFF"/>
+          </a:solidFill>
+          <a:ln>
+            <a:noFill/>
+          </a:ln>
+          <a:effectLst/>
+        </p:spPr>
+        <p:style>
+          <a:lnRef idx="1">
+            <a:schemeClr val="accent1"/>
+          </a:lnRef>
+          <a:fillRef idx="3">
+            <a:schemeClr val="accent1"/>
+          </a:fillRef>
+          <a:effectRef idx="2">
+            <a:schemeClr val="accent1"/>
+          </a:effectRef>
+          <a:fontRef idx="minor">
+            <a:schemeClr val="lt1"/>
+          </a:fontRef>
+        </p:style>
+        <p:txBody>
+          <a:bodyPr rtlCol="0" anchor="ctr" lIns="0" rIns="0" tIns="0" bIns="0"/>
+          <a:lstStyle/>
+          <a:p>
+            <a:pPr algn="ctr"/>
+            <a:r>
+              <a:rPr sz="900" b="1" i="0">
+                <a:solidFill>
+                  <a:srgbClr val="1A1F29"/>
+                </a:solidFill>
+                <a:latin typeface="맑은 고딕"/>
+                <a:ea typeface="맑은 고딕"/>
+              </a:rPr>
+              <a:t>아니오</a:t>
+            </a:r>
+          </a:p>
+        </p:txBody>
+      </p:sp>
+      <p:sp>
+        <p:nvSpPr>
+          <p:cNvPr id="36" name="Rectangle 35"/>
+          <p:cNvSpPr/>
+          <p:nvPr/>
+        </p:nvSpPr>
+        <p:spPr>
+          <a:xfrm>
+            <a:off x="2468880" y="5084064"/>
+            <a:ext cx="548640" cy="182880"/>
+          </a:xfrm>
+          <a:prstGeom prst="rect">
+            <a:avLst/>
+          </a:prstGeom>
+          <a:solidFill>
+            <a:srgbClr val="FFFFFF"/>
+          </a:solidFill>
+          <a:ln>
+            <a:noFill/>
+          </a:ln>
+          <a:effectLst/>
+        </p:spPr>
+        <p:style>
+          <a:lnRef idx="1">
+            <a:schemeClr val="accent1"/>
+          </a:lnRef>
+          <a:fillRef idx="3">
+            <a:schemeClr val="accent1"/>
+          </a:fillRef>
+          <a:effectRef idx="2">
+            <a:schemeClr val="accent1"/>
+          </a:effectRef>
+          <a:fontRef idx="minor">
+            <a:schemeClr val="lt1"/>
+          </a:fontRef>
+        </p:style>
+        <p:txBody>
+          <a:bodyPr rtlCol="0" anchor="ctr" lIns="0" rIns="0" tIns="0" bIns="0"/>
+          <a:lstStyle/>
+          <a:p>
+            <a:pPr algn="ctr"/>
+            <a:r>
+              <a:rPr sz="900" b="1" i="0">
+                <a:solidFill>
+                  <a:srgbClr val="1A1F29"/>
+                </a:solidFill>
+                <a:latin typeface="맑은 고딕"/>
+                <a:ea typeface="맑은 고딕"/>
+              </a:rPr>
+              <a:t>예</a:t>
+            </a:r>
+          </a:p>
+        </p:txBody>
+      </p:sp>
+      <p:sp>
+        <p:nvSpPr>
+          <p:cNvPr id="37" name="Rectangle 36"/>
+          <p:cNvSpPr/>
+          <p:nvPr/>
+        </p:nvSpPr>
+        <p:spPr>
+          <a:xfrm>
+            <a:off x="8778240" y="4443984"/>
+            <a:ext cx="548640" cy="182880"/>
+          </a:xfrm>
+          <a:prstGeom prst="rect">
+            <a:avLst/>
+          </a:prstGeom>
+          <a:solidFill>
+            <a:srgbClr val="FFFFFF"/>
+          </a:solidFill>
+          <a:ln>
+            <a:noFill/>
+          </a:ln>
+          <a:effectLst/>
+        </p:spPr>
+        <p:style>
+          <a:lnRef idx="1">
+            <a:schemeClr val="accent1"/>
+          </a:lnRef>
+          <a:fillRef idx="3">
+            <a:schemeClr val="accent1"/>
+          </a:fillRef>
+          <a:effectRef idx="2">
+            <a:schemeClr val="accent1"/>
+          </a:effectRef>
+          <a:fontRef idx="minor">
+            <a:schemeClr val="lt1"/>
+          </a:fontRef>
+        </p:style>
+        <p:txBody>
+          <a:bodyPr rtlCol="0" anchor="ctr" lIns="0" rIns="0" tIns="0" bIns="0"/>
+          <a:lstStyle/>
+          <a:p>
+            <a:pPr algn="ctr"/>
+            <a:r>
+              <a:rPr sz="900" b="1" i="0">
+                <a:solidFill>
+                  <a:srgbClr val="1A1F29"/>
+                </a:solidFill>
+                <a:latin typeface="맑은 고딕"/>
+                <a:ea typeface="맑은 고딕"/>
+              </a:rPr>
+              <a:t>예</a:t>
+            </a:r>
+          </a:p>
+        </p:txBody>
+      </p:sp>
+      <p:sp>
+        <p:nvSpPr>
+          <p:cNvPr id="38" name="Rectangle 37"/>
+          <p:cNvSpPr/>
+          <p:nvPr/>
+        </p:nvSpPr>
+        <p:spPr>
+          <a:xfrm>
+            <a:off x="548640" y="4334255"/>
+            <a:ext cx="731520" cy="201168"/>
+          </a:xfrm>
+          <a:prstGeom prst="rect">
+            <a:avLst/>
+          </a:prstGeom>
+          <a:solidFill>
+            <a:srgbClr val="FFFFFF"/>
+          </a:solidFill>
+          <a:ln>
+            <a:noFill/>
+          </a:ln>
+          <a:effectLst/>
+        </p:spPr>
+        <p:style>
+          <a:lnRef idx="1">
+            <a:schemeClr val="accent1"/>
+          </a:lnRef>
+          <a:fillRef idx="3">
+            <a:schemeClr val="accent1"/>
+          </a:fillRef>
+          <a:effectRef idx="2">
+            <a:schemeClr val="accent1"/>
+          </a:effectRef>
+          <a:fontRef idx="minor">
+            <a:schemeClr val="lt1"/>
+          </a:fontRef>
+        </p:style>
+        <p:txBody>
+          <a:bodyPr rtlCol="0" anchor="ctr" lIns="0" rIns="0" tIns="0" bIns="0"/>
+          <a:lstStyle/>
+          <a:p>
+            <a:pPr algn="ctr"/>
+            <a:r>
+              <a:rPr sz="900" b="1" i="0">
+                <a:solidFill>
+                  <a:srgbClr val="1A1F29"/>
+                </a:solidFill>
+                <a:latin typeface="맑은 고딕"/>
+                <a:ea typeface="맑은 고딕"/>
+              </a:rPr>
+              <a:t>재질의</a:t>
+            </a:r>
+          </a:p>
+        </p:txBody>
+      </p:sp>
+      <p:sp>
+        <p:nvSpPr>
+          <p:cNvPr id="39" name="Rectangle 38"/>
+          <p:cNvSpPr/>
+          <p:nvPr/>
+        </p:nvSpPr>
+        <p:spPr>
+          <a:xfrm>
+            <a:off x="10241280" y="3557016"/>
+            <a:ext cx="731520" cy="201168"/>
+          </a:xfrm>
+          <a:prstGeom prst="rect">
+            <a:avLst/>
+          </a:prstGeom>
+          <a:solidFill>
+            <a:srgbClr val="FFFFFF"/>
+          </a:solidFill>
+          <a:ln>
+            <a:noFill/>
+          </a:ln>
+          <a:effectLst/>
+        </p:spPr>
+        <p:style>
+          <a:lnRef idx="1">
+            <a:schemeClr val="accent1"/>
+          </a:lnRef>
+          <a:fillRef idx="3">
+            <a:schemeClr val="accent1"/>
+          </a:fillRef>
+          <a:effectRef idx="2">
+            <a:schemeClr val="accent1"/>
+          </a:effectRef>
+          <a:fontRef idx="minor">
+            <a:schemeClr val="lt1"/>
+          </a:fontRef>
+        </p:style>
+        <p:txBody>
+          <a:bodyPr rtlCol="0" anchor="ctr" lIns="0" rIns="0" tIns="0" bIns="0"/>
+          <a:lstStyle/>
+          <a:p>
+            <a:pPr algn="ctr"/>
+            <a:r>
+              <a:rPr sz="900" b="1" i="0">
+                <a:solidFill>
+                  <a:srgbClr val="1A1F29"/>
+                </a:solidFill>
+                <a:latin typeface="맑은 고딕"/>
+                <a:ea typeface="맑은 고딕"/>
+              </a:rPr>
+              <a:t>재질의</a:t>
+            </a:r>
+          </a:p>
+        </p:txBody>
+      </p:sp>
     </p:spTree>
   </p:cSld>
   <p:clrMapOvr>
@@ -10509,7 +11269,7 @@
                 <a:latin typeface="맑은 고딕"/>
                 <a:ea typeface="맑은 고딕"/>
               </a:rPr>
-              <a:t>질의응답 상태 머신</a:t>
+              <a:t>업무 프로세스 — 제원 접수 플로우차트</a:t>
             </a:r>
           </a:p>
         </p:txBody>
@@ -10595,7 +11355,7 @@
                 <a:latin typeface="맑은 고딕"/>
                 <a:ea typeface="맑은 고딕"/>
               </a:rPr>
-              <a:t>상태(status)와 전이 함수, 질의 분류 기준</a:t>
+              <a:t>제원표가 제원 DB에 채워지는 과정(부분접수 포함)</a:t>
             </a:r>
           </a:p>
         </p:txBody>
@@ -10729,965 +11489,485 @@
       </p:sp>
       <p:sp>
         <p:nvSpPr>
-          <p:cNvPr id="9" name="TextBox 8"/>
-          <p:cNvSpPr txBox="1"/>
-          <p:nvPr/>
-        </p:nvSpPr>
-        <p:spPr>
-          <a:xfrm>
-            <a:off x="548640" y="1691640"/>
-            <a:ext cx="5103430" cy="256032"/>
-          </a:xfrm>
-          <a:prstGeom prst="rect">
-            <a:avLst/>
-          </a:prstGeom>
-          <a:noFill/>
-        </p:spPr>
-        <p:txBody>
-          <a:bodyPr wrap="square" anchor="t" lIns="0" rIns="0" tIns="0" bIns="0">
-            <a:spAutoFit/>
-          </a:bodyPr>
-          <a:lstStyle/>
-          <a:p>
-            <a:pPr algn="l"/>
-            <a:r>
-              <a:rPr sz="1450" b="1" i="0">
+          <p:cNvPr id="9" name="Rounded Rectangle 8"/>
+          <p:cNvSpPr/>
+          <p:nvPr/>
+        </p:nvSpPr>
+        <p:spPr>
+          <a:xfrm>
+            <a:off x="3534156" y="1773936"/>
+            <a:ext cx="4572000" cy="384048"/>
+          </a:xfrm>
+          <a:prstGeom prst="roundRect">
+            <a:avLst/>
+          </a:prstGeom>
+          <a:solidFill>
+            <a:srgbClr val="FFFFFF"/>
+          </a:solidFill>
+          <a:ln w="15875">
+            <a:solidFill>
+              <a:srgbClr val="132A46"/>
+            </a:solidFill>
+          </a:ln>
+          <a:effectLst/>
+        </p:spPr>
+        <p:style>
+          <a:lnRef idx="1">
+            <a:schemeClr val="accent1"/>
+          </a:lnRef>
+          <a:fillRef idx="3">
+            <a:schemeClr val="accent1"/>
+          </a:fillRef>
+          <a:effectRef idx="2">
+            <a:schemeClr val="accent1"/>
+          </a:effectRef>
+          <a:fontRef idx="minor">
+            <a:schemeClr val="lt1"/>
+          </a:fontRef>
+        </p:style>
+        <p:txBody>
+          <a:bodyPr rtlCol="0" anchor="ctr" wrap="square" lIns="36576" rIns="36576" tIns="18288" bIns="18288"/>
+          <a:lstStyle/>
+          <a:p>
+            <a:pPr algn="ctr">
+              <a:lnSpc>
+                <a:spcPct val="100000"/>
+              </a:lnSpc>
+            </a:pPr>
+            <a:r>
+              <a:rPr sz="950" b="1" i="0">
                 <a:solidFill>
                   <a:srgbClr val="1A1F29"/>
                 </a:solidFill>
                 <a:latin typeface="맑은 고딕"/>
                 <a:ea typeface="맑은 고딕"/>
               </a:rPr>
-              <a:t>■  상태 (status)</a:t>
-            </a:r>
-          </a:p>
-        </p:txBody>
-      </p:sp>
-      <p:graphicFrame>
-        <p:nvGraphicFramePr>
-          <p:cNvPr id="10" name="Table 9"/>
-          <p:cNvGraphicFramePr>
-            <a:graphicFrameLocks noGrp="1"/>
-          </p:cNvGraphicFramePr>
-          <p:nvPr/>
-        </p:nvGraphicFramePr>
-        <p:xfrm>
-          <a:off x="548640" y="2011680"/>
-          <a:ext cx="5103430" cy="2615184"/>
-        </p:xfrm>
-        <a:graphic>
-          <a:graphicData uri="http://schemas.openxmlformats.org/drawingml/2006/table">
-            <a:tbl>
-              <a:tblPr firstRow="1">
-                <a:tableStyleId>{5C22544A-7EE6-4342-B048-85BDC9FD1C3A}</a:tableStyleId>
-              </a:tblPr>
-              <a:tblGrid>
-                <a:gridCol w="1304210"/>
-                <a:gridCol w="2948649"/>
-                <a:gridCol w="850571"/>
-              </a:tblGrid>
-              <a:tr h="329184">
-                <a:tc>
-                  <a:txBody>
-                    <a:bodyPr wrap="square"/>
-                    <a:lstStyle/>
-                    <a:p>
-                      <a:pPr algn="l"/>
-                      <a:r>
-                        <a:rPr sz="1150" b="1" i="0">
-                          <a:solidFill>
-                            <a:srgbClr val="FFFFFF"/>
-                          </a:solidFill>
-                          <a:latin typeface="맑은 고딕"/>
-                          <a:ea typeface="맑은 고딕"/>
-                        </a:rPr>
-                        <a:t>상태</a:t>
-                      </a:r>
-                    </a:p>
-                  </a:txBody>
-                  <a:tcPr anchor="ctr" marL="73152" marR="73152" marT="27432" marB="27432">
-                    <a:solidFill>
-                      <a:srgbClr val="132A46"/>
-                    </a:solidFill>
-                    <a:lnL w="6350" cap="flat">
-                      <a:solidFill>
-                        <a:srgbClr val="DEE5EE"/>
-                      </a:solidFill>
-                    </a:lnL>
-                    <a:lnR w="6350" cap="flat">
-                      <a:solidFill>
-                        <a:srgbClr val="DEE5EE"/>
-                      </a:solidFill>
-                    </a:lnR>
-                    <a:lnT w="6350" cap="flat">
-                      <a:solidFill>
-                        <a:srgbClr val="DEE5EE"/>
-                      </a:solidFill>
-                    </a:lnT>
-                    <a:lnB w="6350" cap="flat">
-                      <a:solidFill>
-                        <a:srgbClr val="DEE5EE"/>
-                      </a:solidFill>
-                    </a:lnB>
-                  </a:tcPr>
-                </a:tc>
-                <a:tc>
-                  <a:txBody>
-                    <a:bodyPr wrap="square"/>
-                    <a:lstStyle/>
-                    <a:p>
-                      <a:pPr algn="l"/>
-                      <a:r>
-                        <a:rPr sz="1150" b="1" i="0">
-                          <a:solidFill>
-                            <a:srgbClr val="FFFFFF"/>
-                          </a:solidFill>
-                          <a:latin typeface="맑은 고딕"/>
-                          <a:ea typeface="맑은 고딕"/>
-                        </a:rPr>
-                        <a:t>의미</a:t>
-                      </a:r>
-                    </a:p>
-                  </a:txBody>
-                  <a:tcPr anchor="ctr" marL="73152" marR="73152" marT="27432" marB="27432">
-                    <a:solidFill>
-                      <a:srgbClr val="132A46"/>
-                    </a:solidFill>
-                    <a:lnL w="6350" cap="flat">
-                      <a:solidFill>
-                        <a:srgbClr val="DEE5EE"/>
-                      </a:solidFill>
-                    </a:lnL>
-                    <a:lnR w="6350" cap="flat">
-                      <a:solidFill>
-                        <a:srgbClr val="DEE5EE"/>
-                      </a:solidFill>
-                    </a:lnR>
-                    <a:lnT w="6350" cap="flat">
-                      <a:solidFill>
-                        <a:srgbClr val="DEE5EE"/>
-                      </a:solidFill>
-                    </a:lnT>
-                    <a:lnB w="6350" cap="flat">
-                      <a:solidFill>
-                        <a:srgbClr val="DEE5EE"/>
-                      </a:solidFill>
-                    </a:lnB>
-                  </a:tcPr>
-                </a:tc>
-                <a:tc>
-                  <a:txBody>
-                    <a:bodyPr wrap="square"/>
-                    <a:lstStyle/>
-                    <a:p>
-                      <a:pPr algn="l"/>
-                      <a:r>
-                        <a:rPr sz="1150" b="1" i="0">
-                          <a:solidFill>
-                            <a:srgbClr val="FFFFFF"/>
-                          </a:solidFill>
-                          <a:latin typeface="맑은 고딕"/>
-                          <a:ea typeface="맑은 고딕"/>
-                        </a:rPr>
-                        <a:t>다음 처리자</a:t>
-                      </a:r>
-                    </a:p>
-                  </a:txBody>
-                  <a:tcPr anchor="ctr" marL="73152" marR="73152" marT="27432" marB="27432">
-                    <a:solidFill>
-                      <a:srgbClr val="132A46"/>
-                    </a:solidFill>
-                    <a:lnL w="6350" cap="flat">
-                      <a:solidFill>
-                        <a:srgbClr val="DEE5EE"/>
-                      </a:solidFill>
-                    </a:lnL>
-                    <a:lnR w="6350" cap="flat">
-                      <a:solidFill>
-                        <a:srgbClr val="DEE5EE"/>
-                      </a:solidFill>
-                    </a:lnR>
-                    <a:lnT w="6350" cap="flat">
-                      <a:solidFill>
-                        <a:srgbClr val="DEE5EE"/>
-                      </a:solidFill>
-                    </a:lnT>
-                    <a:lnB w="6350" cap="flat">
-                      <a:solidFill>
-                        <a:srgbClr val="DEE5EE"/>
-                      </a:solidFill>
-                    </a:lnB>
-                  </a:tcPr>
-                </a:tc>
-              </a:tr>
-              <a:tr h="457200">
-                <a:tc>
-                  <a:txBody>
-                    <a:bodyPr wrap="square"/>
-                    <a:lstStyle/>
-                    <a:p>
-                      <a:pPr algn="l"/>
-                      <a:r>
-                        <a:rPr sz="950" b="1" i="0">
-                          <a:solidFill>
-                            <a:srgbClr val="1A1F29"/>
-                          </a:solidFill>
-                          <a:latin typeface="맑은 고딕"/>
-                          <a:ea typeface="맑은 고딕"/>
-                        </a:rPr>
-                        <a:t>OPEN</a:t>
-                      </a:r>
-                    </a:p>
-                  </a:txBody>
-                  <a:tcPr anchor="ctr" marL="73152" marR="73152" marT="27432" marB="27432">
-                    <a:solidFill>
-                      <a:srgbClr val="FFFFFF"/>
-                    </a:solidFill>
-                    <a:lnL w="6350" cap="flat">
-                      <a:solidFill>
-                        <a:srgbClr val="DEE5EE"/>
-                      </a:solidFill>
-                    </a:lnL>
-                    <a:lnR w="6350" cap="flat">
-                      <a:solidFill>
-                        <a:srgbClr val="DEE5EE"/>
-                      </a:solidFill>
-                    </a:lnR>
-                    <a:lnT w="6350" cap="flat">
-                      <a:solidFill>
-                        <a:srgbClr val="DEE5EE"/>
-                      </a:solidFill>
-                    </a:lnT>
-                    <a:lnB w="6350" cap="flat">
-                      <a:solidFill>
-                        <a:srgbClr val="DEE5EE"/>
-                      </a:solidFill>
-                    </a:lnB>
-                  </a:tcPr>
-                </a:tc>
-                <a:tc>
-                  <a:txBody>
-                    <a:bodyPr wrap="square"/>
-                    <a:lstStyle/>
-                    <a:p>
-                      <a:pPr algn="l"/>
-                      <a:r>
-                        <a:rPr sz="950" b="0" i="0">
-                          <a:solidFill>
-                            <a:srgbClr val="1A1F29"/>
-                          </a:solidFill>
-                          <a:latin typeface="맑은 고딕"/>
-                          <a:ea typeface="맑은 고딕"/>
-                        </a:rPr>
-                        <a:t>미답변 — AUTO 자동 생성 직후 또는 설계사가 막 등록</a:t>
-                      </a:r>
-                    </a:p>
-                  </a:txBody>
-                  <a:tcPr anchor="ctr" marL="73152" marR="73152" marT="27432" marB="27432">
-                    <a:solidFill>
-                      <a:srgbClr val="FFFFFF"/>
-                    </a:solidFill>
-                    <a:lnL w="6350" cap="flat">
-                      <a:solidFill>
-                        <a:srgbClr val="DEE5EE"/>
-                      </a:solidFill>
-                    </a:lnL>
-                    <a:lnR w="6350" cap="flat">
-                      <a:solidFill>
-                        <a:srgbClr val="DEE5EE"/>
-                      </a:solidFill>
-                    </a:lnR>
-                    <a:lnT w="6350" cap="flat">
-                      <a:solidFill>
-                        <a:srgbClr val="DEE5EE"/>
-                      </a:solidFill>
-                    </a:lnT>
-                    <a:lnB w="6350" cap="flat">
-                      <a:solidFill>
-                        <a:srgbClr val="DEE5EE"/>
-                      </a:solidFill>
-                    </a:lnB>
-                  </a:tcPr>
-                </a:tc>
-                <a:tc>
-                  <a:txBody>
-                    <a:bodyPr wrap="square"/>
-                    <a:lstStyle/>
-                    <a:p>
-                      <a:pPr algn="l"/>
-                      <a:r>
-                        <a:rPr sz="950" b="0" i="0">
-                          <a:solidFill>
-                            <a:srgbClr val="1A1F29"/>
-                          </a:solidFill>
-                          <a:latin typeface="맑은 고딕"/>
-                          <a:ea typeface="맑은 고딕"/>
-                        </a:rPr>
-                        <a:t>기술팀</a:t>
-                      </a:r>
-                    </a:p>
-                  </a:txBody>
-                  <a:tcPr anchor="ctr" marL="73152" marR="73152" marT="27432" marB="27432">
-                    <a:solidFill>
-                      <a:srgbClr val="FFFFFF"/>
-                    </a:solidFill>
-                    <a:lnL w="6350" cap="flat">
-                      <a:solidFill>
-                        <a:srgbClr val="DEE5EE"/>
-                      </a:solidFill>
-                    </a:lnL>
-                    <a:lnR w="6350" cap="flat">
-                      <a:solidFill>
-                        <a:srgbClr val="DEE5EE"/>
-                      </a:solidFill>
-                    </a:lnR>
-                    <a:lnT w="6350" cap="flat">
-                      <a:solidFill>
-                        <a:srgbClr val="DEE5EE"/>
-                      </a:solidFill>
-                    </a:lnT>
-                    <a:lnB w="6350" cap="flat">
-                      <a:solidFill>
-                        <a:srgbClr val="DEE5EE"/>
-                      </a:solidFill>
-                    </a:lnB>
-                  </a:tcPr>
-                </a:tc>
-              </a:tr>
-              <a:tr h="457200">
-                <a:tc>
-                  <a:txBody>
-                    <a:bodyPr wrap="square"/>
-                    <a:lstStyle/>
-                    <a:p>
-                      <a:pPr algn="l"/>
-                      <a:r>
-                        <a:rPr sz="950" b="1" i="0">
-                          <a:solidFill>
-                            <a:srgbClr val="1A1F29"/>
-                          </a:solidFill>
-                          <a:latin typeface="맑은 고딕"/>
-                          <a:ea typeface="맑은 고딕"/>
-                        </a:rPr>
-                        <a:t>VALUE_PROPOSED</a:t>
-                      </a:r>
-                    </a:p>
-                  </a:txBody>
-                  <a:tcPr anchor="ctr" marL="73152" marR="73152" marT="27432" marB="27432">
-                    <a:solidFill>
-                      <a:srgbClr val="FFFFFF"/>
-                    </a:solidFill>
-                    <a:lnL w="6350" cap="flat">
-                      <a:solidFill>
-                        <a:srgbClr val="DEE5EE"/>
-                      </a:solidFill>
-                    </a:lnL>
-                    <a:lnR w="6350" cap="flat">
-                      <a:solidFill>
-                        <a:srgbClr val="DEE5EE"/>
-                      </a:solidFill>
-                    </a:lnR>
-                    <a:lnT w="6350" cap="flat">
-                      <a:solidFill>
-                        <a:srgbClr val="DEE5EE"/>
-                      </a:solidFill>
-                    </a:lnT>
-                    <a:lnB w="6350" cap="flat">
-                      <a:solidFill>
-                        <a:srgbClr val="DEE5EE"/>
-                      </a:solidFill>
-                    </a:lnB>
-                  </a:tcPr>
-                </a:tc>
-                <a:tc>
-                  <a:txBody>
-                    <a:bodyPr wrap="square"/>
-                    <a:lstStyle/>
-                    <a:p>
-                      <a:pPr algn="l"/>
-                      <a:r>
-                        <a:rPr sz="950" b="0" i="0">
-                          <a:solidFill>
-                            <a:srgbClr val="1A1F29"/>
-                          </a:solidFill>
-                          <a:latin typeface="맑은 고딕"/>
-                          <a:ea typeface="맑은 고딕"/>
-                        </a:rPr>
-                        <a:t>값 제안됨(최종승인 대기) — SPEC 질의에서 기술팀이 AS-IS 유지 확인 또는 새 값 제안 완료</a:t>
-                      </a:r>
-                    </a:p>
-                  </a:txBody>
-                  <a:tcPr anchor="ctr" marL="73152" marR="73152" marT="27432" marB="27432">
-                    <a:solidFill>
-                      <a:srgbClr val="FFFFFF"/>
-                    </a:solidFill>
-                    <a:lnL w="6350" cap="flat">
-                      <a:solidFill>
-                        <a:srgbClr val="DEE5EE"/>
-                      </a:solidFill>
-                    </a:lnL>
-                    <a:lnR w="6350" cap="flat">
-                      <a:solidFill>
-                        <a:srgbClr val="DEE5EE"/>
-                      </a:solidFill>
-                    </a:lnR>
-                    <a:lnT w="6350" cap="flat">
-                      <a:solidFill>
-                        <a:srgbClr val="DEE5EE"/>
-                      </a:solidFill>
-                    </a:lnT>
-                    <a:lnB w="6350" cap="flat">
-                      <a:solidFill>
-                        <a:srgbClr val="DEE5EE"/>
-                      </a:solidFill>
-                    </a:lnB>
-                  </a:tcPr>
-                </a:tc>
-                <a:tc>
-                  <a:txBody>
-                    <a:bodyPr wrap="square"/>
-                    <a:lstStyle/>
-                    <a:p>
-                      <a:pPr algn="l"/>
-                      <a:r>
-                        <a:rPr sz="950" b="0" i="0">
-                          <a:solidFill>
-                            <a:srgbClr val="1A1F29"/>
-                          </a:solidFill>
-                          <a:latin typeface="맑은 고딕"/>
-                          <a:ea typeface="맑은 고딕"/>
-                        </a:rPr>
-                        <a:t>설계사</a:t>
-                      </a:r>
-                    </a:p>
-                  </a:txBody>
-                  <a:tcPr anchor="ctr" marL="73152" marR="73152" marT="27432" marB="27432">
-                    <a:solidFill>
-                      <a:srgbClr val="FFFFFF"/>
-                    </a:solidFill>
-                    <a:lnL w="6350" cap="flat">
-                      <a:solidFill>
-                        <a:srgbClr val="DEE5EE"/>
-                      </a:solidFill>
-                    </a:lnL>
-                    <a:lnR w="6350" cap="flat">
-                      <a:solidFill>
-                        <a:srgbClr val="DEE5EE"/>
-                      </a:solidFill>
-                    </a:lnR>
-                    <a:lnT w="6350" cap="flat">
-                      <a:solidFill>
-                        <a:srgbClr val="DEE5EE"/>
-                      </a:solidFill>
-                    </a:lnT>
-                    <a:lnB w="6350" cap="flat">
-                      <a:solidFill>
-                        <a:srgbClr val="DEE5EE"/>
-                      </a:solidFill>
-                    </a:lnB>
-                  </a:tcPr>
-                </a:tc>
-              </a:tr>
-              <a:tr h="457200">
-                <a:tc>
-                  <a:txBody>
-                    <a:bodyPr wrap="square"/>
-                    <a:lstStyle/>
-                    <a:p>
-                      <a:pPr algn="l"/>
-                      <a:r>
-                        <a:rPr sz="950" b="1" i="0">
-                          <a:solidFill>
-                            <a:srgbClr val="1A1F29"/>
-                          </a:solidFill>
-                          <a:latin typeface="맑은 고딕"/>
-                          <a:ea typeface="맑은 고딕"/>
-                        </a:rPr>
-                        <a:t>ANSWERED</a:t>
-                      </a:r>
-                    </a:p>
-                  </a:txBody>
-                  <a:tcPr anchor="ctr" marL="73152" marR="73152" marT="27432" marB="27432">
-                    <a:solidFill>
-                      <a:srgbClr val="FFFFFF"/>
-                    </a:solidFill>
-                    <a:lnL w="6350" cap="flat">
-                      <a:solidFill>
-                        <a:srgbClr val="DEE5EE"/>
-                      </a:solidFill>
-                    </a:lnL>
-                    <a:lnR w="6350" cap="flat">
-                      <a:solidFill>
-                        <a:srgbClr val="DEE5EE"/>
-                      </a:solidFill>
-                    </a:lnR>
-                    <a:lnT w="6350" cap="flat">
-                      <a:solidFill>
-                        <a:srgbClr val="DEE5EE"/>
-                      </a:solidFill>
-                    </a:lnT>
-                    <a:lnB w="6350" cap="flat">
-                      <a:solidFill>
-                        <a:srgbClr val="DEE5EE"/>
-                      </a:solidFill>
-                    </a:lnB>
-                  </a:tcPr>
-                </a:tc>
-                <a:tc>
-                  <a:txBody>
-                    <a:bodyPr wrap="square"/>
-                    <a:lstStyle/>
-                    <a:p>
-                      <a:pPr algn="l"/>
-                      <a:r>
-                        <a:rPr sz="950" b="0" i="0">
-                          <a:solidFill>
-                            <a:srgbClr val="1A1F29"/>
-                          </a:solidFill>
-                          <a:latin typeface="맑은 고딕"/>
-                          <a:ea typeface="맑은 고딕"/>
-                        </a:rPr>
-                        <a:t>답변완료(최종검증 대기) — NON_SPEC 질의에서 기술팀이 서술형 답변 등록</a:t>
-                      </a:r>
-                    </a:p>
-                  </a:txBody>
-                  <a:tcPr anchor="ctr" marL="73152" marR="73152" marT="27432" marB="27432">
-                    <a:solidFill>
-                      <a:srgbClr val="FFFFFF"/>
-                    </a:solidFill>
-                    <a:lnL w="6350" cap="flat">
-                      <a:solidFill>
-                        <a:srgbClr val="DEE5EE"/>
-                      </a:solidFill>
-                    </a:lnL>
-                    <a:lnR w="6350" cap="flat">
-                      <a:solidFill>
-                        <a:srgbClr val="DEE5EE"/>
-                      </a:solidFill>
-                    </a:lnR>
-                    <a:lnT w="6350" cap="flat">
-                      <a:solidFill>
-                        <a:srgbClr val="DEE5EE"/>
-                      </a:solidFill>
-                    </a:lnT>
-                    <a:lnB w="6350" cap="flat">
-                      <a:solidFill>
-                        <a:srgbClr val="DEE5EE"/>
-                      </a:solidFill>
-                    </a:lnB>
-                  </a:tcPr>
-                </a:tc>
-                <a:tc>
-                  <a:txBody>
-                    <a:bodyPr wrap="square"/>
-                    <a:lstStyle/>
-                    <a:p>
-                      <a:pPr algn="l"/>
-                      <a:r>
-                        <a:rPr sz="950" b="0" i="0">
-                          <a:solidFill>
-                            <a:srgbClr val="1A1F29"/>
-                          </a:solidFill>
-                          <a:latin typeface="맑은 고딕"/>
-                          <a:ea typeface="맑은 고딕"/>
-                        </a:rPr>
-                        <a:t>설계사</a:t>
-                      </a:r>
-                    </a:p>
-                  </a:txBody>
-                  <a:tcPr anchor="ctr" marL="73152" marR="73152" marT="27432" marB="27432">
-                    <a:solidFill>
-                      <a:srgbClr val="FFFFFF"/>
-                    </a:solidFill>
-                    <a:lnL w="6350" cap="flat">
-                      <a:solidFill>
-                        <a:srgbClr val="DEE5EE"/>
-                      </a:solidFill>
-                    </a:lnL>
-                    <a:lnR w="6350" cap="flat">
-                      <a:solidFill>
-                        <a:srgbClr val="DEE5EE"/>
-                      </a:solidFill>
-                    </a:lnR>
-                    <a:lnT w="6350" cap="flat">
-                      <a:solidFill>
-                        <a:srgbClr val="DEE5EE"/>
-                      </a:solidFill>
-                    </a:lnT>
-                    <a:lnB w="6350" cap="flat">
-                      <a:solidFill>
-                        <a:srgbClr val="DEE5EE"/>
-                      </a:solidFill>
-                    </a:lnB>
-                  </a:tcPr>
-                </a:tc>
-              </a:tr>
-              <a:tr h="457200">
-                <a:tc>
-                  <a:txBody>
-                    <a:bodyPr wrap="square"/>
-                    <a:lstStyle/>
-                    <a:p>
-                      <a:pPr algn="l"/>
-                      <a:r>
-                        <a:rPr sz="950" b="1" i="0">
-                          <a:solidFill>
-                            <a:srgbClr val="1A1F29"/>
-                          </a:solidFill>
-                          <a:latin typeface="맑은 고딕"/>
-                          <a:ea typeface="맑은 고딕"/>
-                        </a:rPr>
-                        <a:t>RESOLVED</a:t>
-                      </a:r>
-                    </a:p>
-                  </a:txBody>
-                  <a:tcPr anchor="ctr" marL="73152" marR="73152" marT="27432" marB="27432">
-                    <a:solidFill>
-                      <a:srgbClr val="FFFFFF"/>
-                    </a:solidFill>
-                    <a:lnL w="6350" cap="flat">
-                      <a:solidFill>
-                        <a:srgbClr val="DEE5EE"/>
-                      </a:solidFill>
-                    </a:lnL>
-                    <a:lnR w="6350" cap="flat">
-                      <a:solidFill>
-                        <a:srgbClr val="DEE5EE"/>
-                      </a:solidFill>
-                    </a:lnR>
-                    <a:lnT w="6350" cap="flat">
-                      <a:solidFill>
-                        <a:srgbClr val="DEE5EE"/>
-                      </a:solidFill>
-                    </a:lnT>
-                    <a:lnB w="6350" cap="flat">
-                      <a:solidFill>
-                        <a:srgbClr val="DEE5EE"/>
-                      </a:solidFill>
-                    </a:lnB>
-                  </a:tcPr>
-                </a:tc>
-                <a:tc>
-                  <a:txBody>
-                    <a:bodyPr wrap="square"/>
-                    <a:lstStyle/>
-                    <a:p>
-                      <a:pPr algn="l"/>
-                      <a:r>
-                        <a:rPr sz="950" b="0" i="0">
-                          <a:solidFill>
-                            <a:srgbClr val="1A1F29"/>
-                          </a:solidFill>
-                          <a:latin typeface="맑은 고딕"/>
-                          <a:ea typeface="맑은 고딕"/>
-                        </a:rPr>
-                        <a:t>해결됨 — 최종 확인/최종검증 완료로 종결</a:t>
-                      </a:r>
-                    </a:p>
-                  </a:txBody>
-                  <a:tcPr anchor="ctr" marL="73152" marR="73152" marT="27432" marB="27432">
-                    <a:solidFill>
-                      <a:srgbClr val="FFFFFF"/>
-                    </a:solidFill>
-                    <a:lnL w="6350" cap="flat">
-                      <a:solidFill>
-                        <a:srgbClr val="DEE5EE"/>
-                      </a:solidFill>
-                    </a:lnL>
-                    <a:lnR w="6350" cap="flat">
-                      <a:solidFill>
-                        <a:srgbClr val="DEE5EE"/>
-                      </a:solidFill>
-                    </a:lnR>
-                    <a:lnT w="6350" cap="flat">
-                      <a:solidFill>
-                        <a:srgbClr val="DEE5EE"/>
-                      </a:solidFill>
-                    </a:lnT>
-                    <a:lnB w="6350" cap="flat">
-                      <a:solidFill>
-                        <a:srgbClr val="DEE5EE"/>
-                      </a:solidFill>
-                    </a:lnB>
-                  </a:tcPr>
-                </a:tc>
-                <a:tc>
-                  <a:txBody>
-                    <a:bodyPr wrap="square"/>
-                    <a:lstStyle/>
-                    <a:p>
-                      <a:pPr algn="l"/>
-                      <a:r>
-                        <a:rPr sz="950" b="0" i="0">
-                          <a:solidFill>
-                            <a:srgbClr val="1A1F29"/>
-                          </a:solidFill>
-                          <a:latin typeface="맑은 고딕"/>
-                          <a:ea typeface="맑은 고딕"/>
-                        </a:rPr>
-                        <a:t>-</a:t>
-                      </a:r>
-                    </a:p>
-                  </a:txBody>
-                  <a:tcPr anchor="ctr" marL="73152" marR="73152" marT="27432" marB="27432">
-                    <a:solidFill>
-                      <a:srgbClr val="FFFFFF"/>
-                    </a:solidFill>
-                    <a:lnL w="6350" cap="flat">
-                      <a:solidFill>
-                        <a:srgbClr val="DEE5EE"/>
-                      </a:solidFill>
-                    </a:lnL>
-                    <a:lnR w="6350" cap="flat">
-                      <a:solidFill>
-                        <a:srgbClr val="DEE5EE"/>
-                      </a:solidFill>
-                    </a:lnR>
-                    <a:lnT w="6350" cap="flat">
-                      <a:solidFill>
-                        <a:srgbClr val="DEE5EE"/>
-                      </a:solidFill>
-                    </a:lnT>
-                    <a:lnB w="6350" cap="flat">
-                      <a:solidFill>
-                        <a:srgbClr val="DEE5EE"/>
-                      </a:solidFill>
-                    </a:lnB>
-                  </a:tcPr>
-                </a:tc>
-              </a:tr>
-              <a:tr h="457200">
-                <a:tc>
-                  <a:txBody>
-                    <a:bodyPr wrap="square"/>
-                    <a:lstStyle/>
-                    <a:p>
-                      <a:pPr algn="l"/>
-                      <a:r>
-                        <a:rPr sz="950" b="1" i="0">
-                          <a:solidFill>
-                            <a:srgbClr val="1A1F29"/>
-                          </a:solidFill>
-                          <a:latin typeface="맑은 고딕"/>
-                          <a:ea typeface="맑은 고딕"/>
-                        </a:rPr>
-                        <a:t>REJECTED</a:t>
-                      </a:r>
-                    </a:p>
-                  </a:txBody>
-                  <a:tcPr anchor="ctr" marL="73152" marR="73152" marT="27432" marB="27432">
-                    <a:solidFill>
-                      <a:srgbClr val="FFFFFF"/>
-                    </a:solidFill>
-                    <a:lnL w="6350" cap="flat">
-                      <a:solidFill>
-                        <a:srgbClr val="DEE5EE"/>
-                      </a:solidFill>
-                    </a:lnL>
-                    <a:lnR w="6350" cap="flat">
-                      <a:solidFill>
-                        <a:srgbClr val="DEE5EE"/>
-                      </a:solidFill>
-                    </a:lnR>
-                    <a:lnT w="6350" cap="flat">
-                      <a:solidFill>
-                        <a:srgbClr val="DEE5EE"/>
-                      </a:solidFill>
-                    </a:lnT>
-                    <a:lnB w="6350" cap="flat">
-                      <a:solidFill>
-                        <a:srgbClr val="DEE5EE"/>
-                      </a:solidFill>
-                    </a:lnB>
-                  </a:tcPr>
-                </a:tc>
-                <a:tc>
-                  <a:txBody>
-                    <a:bodyPr wrap="square"/>
-                    <a:lstStyle/>
-                    <a:p>
-                      <a:pPr algn="l"/>
-                      <a:r>
-                        <a:rPr sz="950" b="0" i="0">
-                          <a:solidFill>
-                            <a:srgbClr val="1A1F29"/>
-                          </a:solidFill>
-                          <a:latin typeface="맑은 고딕"/>
-                          <a:ea typeface="맑은 고딕"/>
-                        </a:rPr>
-                        <a:t>반려됨(레거시/특수 케이스)</a:t>
-                      </a:r>
-                    </a:p>
-                  </a:txBody>
-                  <a:tcPr anchor="ctr" marL="73152" marR="73152" marT="27432" marB="27432">
-                    <a:solidFill>
-                      <a:srgbClr val="FFFFFF"/>
-                    </a:solidFill>
-                    <a:lnL w="6350" cap="flat">
-                      <a:solidFill>
-                        <a:srgbClr val="DEE5EE"/>
-                      </a:solidFill>
-                    </a:lnL>
-                    <a:lnR w="6350" cap="flat">
-                      <a:solidFill>
-                        <a:srgbClr val="DEE5EE"/>
-                      </a:solidFill>
-                    </a:lnR>
-                    <a:lnT w="6350" cap="flat">
-                      <a:solidFill>
-                        <a:srgbClr val="DEE5EE"/>
-                      </a:solidFill>
-                    </a:lnT>
-                    <a:lnB w="6350" cap="flat">
-                      <a:solidFill>
-                        <a:srgbClr val="DEE5EE"/>
-                      </a:solidFill>
-                    </a:lnB>
-                  </a:tcPr>
-                </a:tc>
-                <a:tc>
-                  <a:txBody>
-                    <a:bodyPr wrap="square"/>
-                    <a:lstStyle/>
-                    <a:p>
-                      <a:pPr algn="l"/>
-                      <a:r>
-                        <a:rPr sz="950" b="0" i="0">
-                          <a:solidFill>
-                            <a:srgbClr val="1A1F29"/>
-                          </a:solidFill>
-                          <a:latin typeface="맑은 고딕"/>
-                          <a:ea typeface="맑은 고딕"/>
-                        </a:rPr>
-                        <a:t>-</a:t>
-                      </a:r>
-                    </a:p>
-                  </a:txBody>
-                  <a:tcPr anchor="ctr" marL="73152" marR="73152" marT="27432" marB="27432">
-                    <a:solidFill>
-                      <a:srgbClr val="FFFFFF"/>
-                    </a:solidFill>
-                    <a:lnL w="6350" cap="flat">
-                      <a:solidFill>
-                        <a:srgbClr val="DEE5EE"/>
-                      </a:solidFill>
-                    </a:lnL>
-                    <a:lnR w="6350" cap="flat">
-                      <a:solidFill>
-                        <a:srgbClr val="DEE5EE"/>
-                      </a:solidFill>
-                    </a:lnR>
-                    <a:lnT w="6350" cap="flat">
-                      <a:solidFill>
-                        <a:srgbClr val="DEE5EE"/>
-                      </a:solidFill>
-                    </a:lnT>
-                    <a:lnB w="6350" cap="flat">
-                      <a:solidFill>
-                        <a:srgbClr val="DEE5EE"/>
-                      </a:solidFill>
-                    </a:lnB>
-                  </a:tcPr>
-                </a:tc>
-              </a:tr>
-            </a:tbl>
-          </a:graphicData>
-        </a:graphic>
-      </p:graphicFrame>
-      <p:sp>
-        <p:nvSpPr>
-          <p:cNvPr id="11" name="Rectangle 10"/>
-          <p:cNvSpPr/>
-          <p:nvPr/>
-        </p:nvSpPr>
-        <p:spPr>
-          <a:xfrm>
-            <a:off x="548640" y="4764024"/>
-            <a:ext cx="5103430" cy="1508759"/>
-          </a:xfrm>
-          <a:prstGeom prst="rect">
-            <a:avLst/>
-          </a:prstGeom>
-          <a:solidFill>
-            <a:srgbClr val="F4F6FA"/>
-          </a:solidFill>
-          <a:ln w="12700">
-            <a:solidFill>
-              <a:srgbClr val="DEE5EE"/>
-            </a:solidFill>
-          </a:ln>
-          <a:effectLst/>
-        </p:spPr>
-        <p:style>
-          <a:lnRef idx="1">
-            <a:schemeClr val="accent1"/>
-          </a:lnRef>
-          <a:fillRef idx="3">
-            <a:schemeClr val="accent1"/>
-          </a:fillRef>
-          <a:effectRef idx="2">
-            <a:schemeClr val="accent1"/>
-          </a:effectRef>
-          <a:fontRef idx="minor">
-            <a:schemeClr val="lt1"/>
-          </a:fontRef>
-        </p:style>
-        <p:txBody>
-          <a:bodyPr rtlCol="0" anchor="ctr" wrap="square" lIns="109728" rIns="109728" tIns="73152" bIns="73152"/>
-          <a:lstStyle/>
-          <a:p>
-            <a:pPr algn="ctr"/>
-            <a:r>
-              <a:rPr sz="1200" b="1" i="0">
+              <a:t>제원표 도착</a:t>
+            </a:r>
+          </a:p>
+          <a:p>
+            <a:pPr algn="ctr">
+              <a:lnSpc>
+                <a:spcPct val="100000"/>
+              </a:lnSpc>
+            </a:pPr>
+            <a:r>
+              <a:rPr sz="950" b="1" i="0">
                 <a:solidFill>
                   <a:srgbClr val="1A1F29"/>
                 </a:solidFill>
                 <a:latin typeface="맑은 고딕"/>
                 <a:ea typeface="맑은 고딕"/>
               </a:rPr>
-              <a:t>■  질의 분류 기준 (queryNature)</a:t>
-            </a:r>
-          </a:p>
-          <a:p>
-            <a:pPr>
+              <a:t>(전체 또는 부분 접수 가능)</a:t>
+            </a:r>
+          </a:p>
+        </p:txBody>
+      </p:sp>
+      <p:sp>
+        <p:nvSpPr>
+          <p:cNvPr id="10" name="Diamond 9"/>
+          <p:cNvSpPr/>
+          <p:nvPr/>
+        </p:nvSpPr>
+        <p:spPr>
+          <a:xfrm>
+            <a:off x="4448556" y="2240280"/>
+            <a:ext cx="2743200" cy="914400"/>
+          </a:xfrm>
+          <a:prstGeom prst="diamond">
+            <a:avLst/>
+          </a:prstGeom>
+          <a:solidFill>
+            <a:srgbClr val="F4F6FA"/>
+          </a:solidFill>
+          <a:ln w="15875">
+            <a:solidFill>
+              <a:srgbClr val="132A46"/>
+            </a:solidFill>
+          </a:ln>
+          <a:effectLst/>
+        </p:spPr>
+        <p:style>
+          <a:lnRef idx="1">
+            <a:schemeClr val="accent1"/>
+          </a:lnRef>
+          <a:fillRef idx="3">
+            <a:schemeClr val="accent1"/>
+          </a:fillRef>
+          <a:effectRef idx="2">
+            <a:schemeClr val="accent1"/>
+          </a:effectRef>
+          <a:fontRef idx="minor">
+            <a:schemeClr val="lt1"/>
+          </a:fontRef>
+        </p:style>
+        <p:txBody>
+          <a:bodyPr rtlCol="0" anchor="ctr" wrap="square" lIns="36576" rIns="36576" tIns="18288" bIns="18288"/>
+          <a:lstStyle/>
+          <a:p>
+            <a:pPr algn="ctr">
               <a:lnSpc>
-                <a:spcPct val="110000"/>
+                <a:spcPct val="100000"/>
               </a:lnSpc>
-              <a:spcBef>
-                <a:spcPts val="400"/>
-              </a:spcBef>
             </a:pPr>
             <a:r>
-              <a:rPr sz="1050" b="0" i="0">
+              <a:rPr sz="1050" b="1" i="0">
                 <a:solidFill>
                   <a:srgbClr val="1A1F29"/>
                 </a:solidFill>
                 <a:latin typeface="맑은 고딕"/>
                 <a:ea typeface="맑은 고딕"/>
               </a:rPr>
-              <a:t>SPEC — 제원 DB 값을 바꾸거나 바꿀지 판단하는 질의(AUTO 전체 + 값 확인/변경 목적 MANUAL). NON_SPEC — 제원 DB 값과 무관한 일반 문의. 등록 시점에 이 기준으로 갈려 서로 다른 상태 흐름을 따른다.</a:t>
+              <a:t>표준 엑셀</a:t>
+            </a:r>
+          </a:p>
+          <a:p>
+            <a:pPr algn="ctr">
+              <a:lnSpc>
+                <a:spcPct val="100000"/>
+              </a:lnSpc>
+            </a:pPr>
+            <a:r>
+              <a:rPr sz="1050" b="1" i="0">
+                <a:solidFill>
+                  <a:srgbClr val="1A1F29"/>
+                </a:solidFill>
+                <a:latin typeface="맑은 고딕"/>
+                <a:ea typeface="맑은 고딕"/>
+              </a:rPr>
+              <a:t>양식인가?</a:t>
+            </a:r>
+          </a:p>
+        </p:txBody>
+      </p:sp>
+      <p:sp>
+        <p:nvSpPr>
+          <p:cNvPr id="11" name="Rounded Rectangle 10"/>
+          <p:cNvSpPr/>
+          <p:nvPr/>
+        </p:nvSpPr>
+        <p:spPr>
+          <a:xfrm>
+            <a:off x="1463040" y="2994660"/>
+            <a:ext cx="2926080" cy="502920"/>
+          </a:xfrm>
+          <a:prstGeom prst="roundRect">
+            <a:avLst/>
+          </a:prstGeom>
+          <a:solidFill>
+            <a:srgbClr val="FFFFFF"/>
+          </a:solidFill>
+          <a:ln w="15875">
+            <a:solidFill>
+              <a:srgbClr val="132A46"/>
+            </a:solidFill>
+          </a:ln>
+          <a:effectLst/>
+        </p:spPr>
+        <p:style>
+          <a:lnRef idx="1">
+            <a:schemeClr val="accent1"/>
+          </a:lnRef>
+          <a:fillRef idx="3">
+            <a:schemeClr val="accent1"/>
+          </a:fillRef>
+          <a:effectRef idx="2">
+            <a:schemeClr val="accent1"/>
+          </a:effectRef>
+          <a:fontRef idx="minor">
+            <a:schemeClr val="lt1"/>
+          </a:fontRef>
+        </p:style>
+        <p:txBody>
+          <a:bodyPr rtlCol="0" anchor="ctr" wrap="square" lIns="36576" rIns="36576" tIns="18288" bIns="18288"/>
+          <a:lstStyle/>
+          <a:p>
+            <a:pPr algn="ctr">
+              <a:lnSpc>
+                <a:spcPct val="100000"/>
+              </a:lnSpc>
+            </a:pPr>
+            <a:r>
+              <a:rPr sz="950" b="1" i="0">
+                <a:solidFill>
+                  <a:srgbClr val="1A1F29"/>
+                </a:solidFill>
+                <a:latin typeface="맑은 고딕"/>
+                <a:ea typeface="맑은 고딕"/>
+              </a:rPr>
+              <a:t>제원표 업로드</a:t>
+            </a:r>
+          </a:p>
+          <a:p>
+            <a:pPr algn="ctr">
+              <a:lnSpc>
+                <a:spcPct val="100000"/>
+              </a:lnSpc>
+            </a:pPr>
+            <a:r>
+              <a:rPr sz="950" b="1" i="0">
+                <a:solidFill>
+                  <a:srgbClr val="1A1F29"/>
+                </a:solidFill>
+                <a:latin typeface="맑은 고딕"/>
+                <a:ea typeface="맑은 고딕"/>
+              </a:rPr>
+              <a:t>(관리자 · 자동 파싱 · 건설코드별 누적)</a:t>
+            </a:r>
+          </a:p>
+        </p:txBody>
+      </p:sp>
+      <p:sp>
+        <p:nvSpPr>
+          <p:cNvPr id="12" name="Rounded Rectangle 11"/>
+          <p:cNvSpPr/>
+          <p:nvPr/>
+        </p:nvSpPr>
+        <p:spPr>
+          <a:xfrm>
+            <a:off x="7223760" y="2994660"/>
+            <a:ext cx="2926080" cy="502920"/>
+          </a:xfrm>
+          <a:prstGeom prst="roundRect">
+            <a:avLst/>
+          </a:prstGeom>
+          <a:solidFill>
+            <a:srgbClr val="FFFFFF"/>
+          </a:solidFill>
+          <a:ln w="15875">
+            <a:solidFill>
+              <a:srgbClr val="132A46"/>
+            </a:solidFill>
+          </a:ln>
+          <a:effectLst/>
+        </p:spPr>
+        <p:style>
+          <a:lnRef idx="1">
+            <a:schemeClr val="accent1"/>
+          </a:lnRef>
+          <a:fillRef idx="3">
+            <a:schemeClr val="accent1"/>
+          </a:fillRef>
+          <a:effectRef idx="2">
+            <a:schemeClr val="accent1"/>
+          </a:effectRef>
+          <a:fontRef idx="minor">
+            <a:schemeClr val="lt1"/>
+          </a:fontRef>
+        </p:style>
+        <p:txBody>
+          <a:bodyPr rtlCol="0" anchor="ctr" wrap="square" lIns="36576" rIns="36576" tIns="18288" bIns="18288"/>
+          <a:lstStyle/>
+          <a:p>
+            <a:pPr algn="ctr">
+              <a:lnSpc>
+                <a:spcPct val="100000"/>
+              </a:lnSpc>
+            </a:pPr>
+            <a:r>
+              <a:rPr sz="950" b="1" i="0">
+                <a:solidFill>
+                  <a:srgbClr val="1A1F29"/>
+                </a:solidFill>
+                <a:latin typeface="맑은 고딕"/>
+                <a:ea typeface="맑은 고딕"/>
+              </a:rPr>
+              <a:t>제원 수기입력 요청</a:t>
+            </a:r>
+          </a:p>
+          <a:p>
+            <a:pPr algn="ctr">
+              <a:lnSpc>
+                <a:spcPct val="100000"/>
+              </a:lnSpc>
+            </a:pPr>
+            <a:r>
+              <a:rPr sz="950" b="1" i="0">
+                <a:solidFill>
+                  <a:srgbClr val="1A1F29"/>
+                </a:solidFill>
+                <a:latin typeface="맑은 고딕"/>
+                <a:ea typeface="맑은 고딕"/>
+              </a:rPr>
+              <a:t>(기술팀 담당자)</a:t>
+            </a:r>
+          </a:p>
+        </p:txBody>
+      </p:sp>
+      <p:sp>
+        <p:nvSpPr>
+          <p:cNvPr id="13" name="Diamond 12"/>
+          <p:cNvSpPr/>
+          <p:nvPr/>
+        </p:nvSpPr>
+        <p:spPr>
+          <a:xfrm>
+            <a:off x="7406640" y="3817620"/>
+            <a:ext cx="2560320" cy="868680"/>
+          </a:xfrm>
+          <a:prstGeom prst="diamond">
+            <a:avLst/>
+          </a:prstGeom>
+          <a:solidFill>
+            <a:srgbClr val="F4F6FA"/>
+          </a:solidFill>
+          <a:ln w="15875">
+            <a:solidFill>
+              <a:srgbClr val="132A46"/>
+            </a:solidFill>
+          </a:ln>
+          <a:effectLst/>
+        </p:spPr>
+        <p:style>
+          <a:lnRef idx="1">
+            <a:schemeClr val="accent1"/>
+          </a:lnRef>
+          <a:fillRef idx="3">
+            <a:schemeClr val="accent1"/>
+          </a:fillRef>
+          <a:effectRef idx="2">
+            <a:schemeClr val="accent1"/>
+          </a:effectRef>
+          <a:fontRef idx="minor">
+            <a:schemeClr val="lt1"/>
+          </a:fontRef>
+        </p:style>
+        <p:txBody>
+          <a:bodyPr rtlCol="0" anchor="ctr" wrap="square" lIns="36576" rIns="36576" tIns="18288" bIns="18288"/>
+          <a:lstStyle/>
+          <a:p>
+            <a:pPr algn="ctr">
+              <a:lnSpc>
+                <a:spcPct val="100000"/>
+              </a:lnSpc>
+            </a:pPr>
+            <a:r>
+              <a:rPr sz="1000" b="1" i="0">
+                <a:solidFill>
+                  <a:srgbClr val="1A1F29"/>
+                </a:solidFill>
+                <a:latin typeface="맑은 고딕"/>
+                <a:ea typeface="맑은 고딕"/>
+              </a:rPr>
+              <a:t>건설팀</a:t>
+            </a:r>
+          </a:p>
+          <a:p>
+            <a:pPr algn="ctr">
+              <a:lnSpc>
+                <a:spcPct val="100000"/>
+              </a:lnSpc>
+            </a:pPr>
+            <a:r>
+              <a:rPr sz="1000" b="1" i="0">
+                <a:solidFill>
+                  <a:srgbClr val="1A1F29"/>
+                </a:solidFill>
+                <a:latin typeface="맑은 고딕"/>
+                <a:ea typeface="맑은 고딕"/>
+              </a:rPr>
+              <a:t>승인?</a:t>
+            </a:r>
+          </a:p>
+        </p:txBody>
+      </p:sp>
+      <p:sp>
+        <p:nvSpPr>
+          <p:cNvPr id="14" name="Rounded Rectangle 13"/>
+          <p:cNvSpPr/>
+          <p:nvPr/>
+        </p:nvSpPr>
+        <p:spPr>
+          <a:xfrm>
+            <a:off x="3076956" y="5372100"/>
+            <a:ext cx="5486400" cy="502920"/>
+          </a:xfrm>
+          <a:prstGeom prst="roundRect">
+            <a:avLst/>
+          </a:prstGeom>
+          <a:solidFill>
+            <a:srgbClr val="132A46"/>
+          </a:solidFill>
+          <a:ln w="15875">
+            <a:solidFill>
+              <a:srgbClr val="132A46"/>
+            </a:solidFill>
+          </a:ln>
+          <a:effectLst/>
+        </p:spPr>
+        <p:style>
+          <a:lnRef idx="1">
+            <a:schemeClr val="accent1"/>
+          </a:lnRef>
+          <a:fillRef idx="3">
+            <a:schemeClr val="accent1"/>
+          </a:fillRef>
+          <a:effectRef idx="2">
+            <a:schemeClr val="accent1"/>
+          </a:effectRef>
+          <a:fontRef idx="minor">
+            <a:schemeClr val="lt1"/>
+          </a:fontRef>
+        </p:style>
+        <p:txBody>
+          <a:bodyPr rtlCol="0" anchor="ctr" wrap="square" lIns="36576" rIns="36576" tIns="18288" bIns="18288"/>
+          <a:lstStyle/>
+          <a:p>
+            <a:pPr algn="ctr">
+              <a:lnSpc>
+                <a:spcPct val="100000"/>
+              </a:lnSpc>
+            </a:pPr>
+            <a:r>
+              <a:rPr sz="1000" b="1" i="0">
+                <a:solidFill>
+                  <a:srgbClr val="FFFFFF"/>
+                </a:solidFill>
+                <a:latin typeface="맑은 고딕"/>
+                <a:ea typeface="맑은 고딕"/>
+              </a:rPr>
+              <a:t>제원 DB 반영</a:t>
+            </a:r>
+          </a:p>
+          <a:p>
+            <a:pPr algn="ctr">
+              <a:lnSpc>
+                <a:spcPct val="100000"/>
+              </a:lnSpc>
+            </a:pPr>
+            <a:r>
+              <a:rPr sz="1000" b="1" i="0">
+                <a:solidFill>
+                  <a:srgbClr val="FFFFFF"/>
+                </a:solidFill>
+                <a:latin typeface="맑은 고딕"/>
+                <a:ea typeface="맑은 고딕"/>
+              </a:rPr>
+              <a:t>(버전 +1 · 검증 규칙 실행)</a:t>
             </a:r>
           </a:p>
         </p:txBody>
       </p:sp>
       <p:cxnSp>
         <p:nvCxnSpPr>
-          <p:cNvPr id="12" name="Connector 11"/>
+          <p:cNvPr id="15" name="Connector 14"/>
           <p:cNvCxnSpPr/>
           <p:nvPr/>
         </p:nvCxnSpPr>
         <p:spPr>
           <a:xfrm>
-            <a:off x="5789230" y="1691640"/>
-            <a:ext cx="0" cy="4581144"/>
+            <a:off x="5820156" y="2157984"/>
+            <a:ext cx="0" cy="82296"/>
           </a:xfrm>
           <a:prstGeom prst="line">
             <a:avLst/>
           </a:prstGeom>
-          <a:ln w="12700">
+          <a:ln w="15875">
             <a:solidFill>
-              <a:srgbClr val="DEE5EE"/>
+              <a:srgbClr val="132A46"/>
             </a:solidFill>
+            <a:tailEnd type="triangle" w="med" len="med"/>
           </a:ln>
         </p:spPr>
         <p:style>
@@ -11705,1141 +11985,721 @@
           </a:fontRef>
         </p:style>
       </p:cxnSp>
-      <p:sp>
-        <p:nvSpPr>
-          <p:cNvPr id="13" name="TextBox 12"/>
-          <p:cNvSpPr txBox="1"/>
-          <p:nvPr/>
-        </p:nvSpPr>
-        <p:spPr>
-          <a:xfrm>
-            <a:off x="5926390" y="1691640"/>
-            <a:ext cx="5716664" cy="256032"/>
+      <p:cxnSp>
+        <p:nvCxnSpPr>
+          <p:cNvPr id="16" name="Connector 15"/>
+          <p:cNvCxnSpPr/>
+          <p:nvPr/>
+        </p:nvCxnSpPr>
+        <p:spPr>
+          <a:xfrm flipH="1">
+            <a:off x="2926080" y="2697480"/>
+            <a:ext cx="1522476" cy="0"/>
+          </a:xfrm>
+          <a:prstGeom prst="line">
+            <a:avLst/>
+          </a:prstGeom>
+          <a:ln w="15875">
+            <a:solidFill>
+              <a:srgbClr val="132A46"/>
+            </a:solidFill>
+          </a:ln>
+        </p:spPr>
+        <p:style>
+          <a:lnRef idx="2">
+            <a:schemeClr val="accent1"/>
+          </a:lnRef>
+          <a:fillRef idx="0">
+            <a:schemeClr val="accent1"/>
+          </a:fillRef>
+          <a:effectRef idx="1">
+            <a:schemeClr val="accent1"/>
+          </a:effectRef>
+          <a:fontRef idx="minor">
+            <a:schemeClr val="tx1"/>
+          </a:fontRef>
+        </p:style>
+      </p:cxnSp>
+      <p:cxnSp>
+        <p:nvCxnSpPr>
+          <p:cNvPr id="17" name="Connector 16"/>
+          <p:cNvCxnSpPr/>
+          <p:nvPr/>
+        </p:nvCxnSpPr>
+        <p:spPr>
+          <a:xfrm>
+            <a:off x="2926080" y="2697480"/>
+            <a:ext cx="0" cy="297180"/>
+          </a:xfrm>
+          <a:prstGeom prst="line">
+            <a:avLst/>
+          </a:prstGeom>
+          <a:ln w="15875">
+            <a:solidFill>
+              <a:srgbClr val="132A46"/>
+            </a:solidFill>
+            <a:tailEnd type="triangle" w="med" len="med"/>
+          </a:ln>
+        </p:spPr>
+        <p:style>
+          <a:lnRef idx="2">
+            <a:schemeClr val="accent1"/>
+          </a:lnRef>
+          <a:fillRef idx="0">
+            <a:schemeClr val="accent1"/>
+          </a:fillRef>
+          <a:effectRef idx="1">
+            <a:schemeClr val="accent1"/>
+          </a:effectRef>
+          <a:fontRef idx="minor">
+            <a:schemeClr val="tx1"/>
+          </a:fontRef>
+        </p:style>
+      </p:cxnSp>
+      <p:cxnSp>
+        <p:nvCxnSpPr>
+          <p:cNvPr id="18" name="Connector 17"/>
+          <p:cNvCxnSpPr/>
+          <p:nvPr/>
+        </p:nvCxnSpPr>
+        <p:spPr>
+          <a:xfrm>
+            <a:off x="7191756" y="2697480"/>
+            <a:ext cx="1495044" cy="0"/>
+          </a:xfrm>
+          <a:prstGeom prst="line">
+            <a:avLst/>
+          </a:prstGeom>
+          <a:ln w="15875">
+            <a:solidFill>
+              <a:srgbClr val="132A46"/>
+            </a:solidFill>
+          </a:ln>
+        </p:spPr>
+        <p:style>
+          <a:lnRef idx="2">
+            <a:schemeClr val="accent1"/>
+          </a:lnRef>
+          <a:fillRef idx="0">
+            <a:schemeClr val="accent1"/>
+          </a:fillRef>
+          <a:effectRef idx="1">
+            <a:schemeClr val="accent1"/>
+          </a:effectRef>
+          <a:fontRef idx="minor">
+            <a:schemeClr val="tx1"/>
+          </a:fontRef>
+        </p:style>
+      </p:cxnSp>
+      <p:cxnSp>
+        <p:nvCxnSpPr>
+          <p:cNvPr id="19" name="Connector 18"/>
+          <p:cNvCxnSpPr/>
+          <p:nvPr/>
+        </p:nvCxnSpPr>
+        <p:spPr>
+          <a:xfrm>
+            <a:off x="8686800" y="2697480"/>
+            <a:ext cx="0" cy="297180"/>
+          </a:xfrm>
+          <a:prstGeom prst="line">
+            <a:avLst/>
+          </a:prstGeom>
+          <a:ln w="15875">
+            <a:solidFill>
+              <a:srgbClr val="132A46"/>
+            </a:solidFill>
+            <a:tailEnd type="triangle" w="med" len="med"/>
+          </a:ln>
+        </p:spPr>
+        <p:style>
+          <a:lnRef idx="2">
+            <a:schemeClr val="accent1"/>
+          </a:lnRef>
+          <a:fillRef idx="0">
+            <a:schemeClr val="accent1"/>
+          </a:fillRef>
+          <a:effectRef idx="1">
+            <a:schemeClr val="accent1"/>
+          </a:effectRef>
+          <a:fontRef idx="minor">
+            <a:schemeClr val="tx1"/>
+          </a:fontRef>
+        </p:style>
+      </p:cxnSp>
+      <p:cxnSp>
+        <p:nvCxnSpPr>
+          <p:cNvPr id="20" name="Connector 19"/>
+          <p:cNvCxnSpPr/>
+          <p:nvPr/>
+        </p:nvCxnSpPr>
+        <p:spPr>
+          <a:xfrm>
+            <a:off x="2926080" y="3497580"/>
+            <a:ext cx="0" cy="1623060"/>
+          </a:xfrm>
+          <a:prstGeom prst="line">
+            <a:avLst/>
+          </a:prstGeom>
+          <a:ln w="15875">
+            <a:solidFill>
+              <a:srgbClr val="132A46"/>
+            </a:solidFill>
+          </a:ln>
+        </p:spPr>
+        <p:style>
+          <a:lnRef idx="2">
+            <a:schemeClr val="accent1"/>
+          </a:lnRef>
+          <a:fillRef idx="0">
+            <a:schemeClr val="accent1"/>
+          </a:fillRef>
+          <a:effectRef idx="1">
+            <a:schemeClr val="accent1"/>
+          </a:effectRef>
+          <a:fontRef idx="minor">
+            <a:schemeClr val="tx1"/>
+          </a:fontRef>
+        </p:style>
+      </p:cxnSp>
+      <p:cxnSp>
+        <p:nvCxnSpPr>
+          <p:cNvPr id="21" name="Connector 20"/>
+          <p:cNvCxnSpPr/>
+          <p:nvPr/>
+        </p:nvCxnSpPr>
+        <p:spPr>
+          <a:xfrm>
+            <a:off x="2926080" y="5120640"/>
+            <a:ext cx="914400" cy="0"/>
+          </a:xfrm>
+          <a:prstGeom prst="line">
+            <a:avLst/>
+          </a:prstGeom>
+          <a:ln w="15875">
+            <a:solidFill>
+              <a:srgbClr val="132A46"/>
+            </a:solidFill>
+          </a:ln>
+        </p:spPr>
+        <p:style>
+          <a:lnRef idx="2">
+            <a:schemeClr val="accent1"/>
+          </a:lnRef>
+          <a:fillRef idx="0">
+            <a:schemeClr val="accent1"/>
+          </a:fillRef>
+          <a:effectRef idx="1">
+            <a:schemeClr val="accent1"/>
+          </a:effectRef>
+          <a:fontRef idx="minor">
+            <a:schemeClr val="tx1"/>
+          </a:fontRef>
+        </p:style>
+      </p:cxnSp>
+      <p:cxnSp>
+        <p:nvCxnSpPr>
+          <p:cNvPr id="22" name="Connector 21"/>
+          <p:cNvCxnSpPr/>
+          <p:nvPr/>
+        </p:nvCxnSpPr>
+        <p:spPr>
+          <a:xfrm>
+            <a:off x="3840480" y="5120640"/>
+            <a:ext cx="0" cy="251460"/>
+          </a:xfrm>
+          <a:prstGeom prst="line">
+            <a:avLst/>
+          </a:prstGeom>
+          <a:ln w="15875">
+            <a:solidFill>
+              <a:srgbClr val="132A46"/>
+            </a:solidFill>
+            <a:tailEnd type="triangle" w="med" len="med"/>
+          </a:ln>
+        </p:spPr>
+        <p:style>
+          <a:lnRef idx="2">
+            <a:schemeClr val="accent1"/>
+          </a:lnRef>
+          <a:fillRef idx="0">
+            <a:schemeClr val="accent1"/>
+          </a:fillRef>
+          <a:effectRef idx="1">
+            <a:schemeClr val="accent1"/>
+          </a:effectRef>
+          <a:fontRef idx="minor">
+            <a:schemeClr val="tx1"/>
+          </a:fontRef>
+        </p:style>
+      </p:cxnSp>
+      <p:cxnSp>
+        <p:nvCxnSpPr>
+          <p:cNvPr id="23" name="Connector 22"/>
+          <p:cNvCxnSpPr/>
+          <p:nvPr/>
+        </p:nvCxnSpPr>
+        <p:spPr>
+          <a:xfrm>
+            <a:off x="8686800" y="3497580"/>
+            <a:ext cx="0" cy="320040"/>
+          </a:xfrm>
+          <a:prstGeom prst="line">
+            <a:avLst/>
+          </a:prstGeom>
+          <a:ln w="15875">
+            <a:solidFill>
+              <a:srgbClr val="132A46"/>
+            </a:solidFill>
+            <a:tailEnd type="triangle" w="med" len="med"/>
+          </a:ln>
+        </p:spPr>
+        <p:style>
+          <a:lnRef idx="2">
+            <a:schemeClr val="accent1"/>
+          </a:lnRef>
+          <a:fillRef idx="0">
+            <a:schemeClr val="accent1"/>
+          </a:fillRef>
+          <a:effectRef idx="1">
+            <a:schemeClr val="accent1"/>
+          </a:effectRef>
+          <a:fontRef idx="minor">
+            <a:schemeClr val="tx1"/>
+          </a:fontRef>
+        </p:style>
+      </p:cxnSp>
+      <p:cxnSp>
+        <p:nvCxnSpPr>
+          <p:cNvPr id="24" name="Connector 23"/>
+          <p:cNvCxnSpPr/>
+          <p:nvPr/>
+        </p:nvCxnSpPr>
+        <p:spPr>
+          <a:xfrm>
+            <a:off x="8686800" y="4686300"/>
+            <a:ext cx="0" cy="434340"/>
+          </a:xfrm>
+          <a:prstGeom prst="line">
+            <a:avLst/>
+          </a:prstGeom>
+          <a:ln w="15875">
+            <a:solidFill>
+              <a:srgbClr val="132A46"/>
+            </a:solidFill>
+          </a:ln>
+        </p:spPr>
+        <p:style>
+          <a:lnRef idx="2">
+            <a:schemeClr val="accent1"/>
+          </a:lnRef>
+          <a:fillRef idx="0">
+            <a:schemeClr val="accent1"/>
+          </a:fillRef>
+          <a:effectRef idx="1">
+            <a:schemeClr val="accent1"/>
+          </a:effectRef>
+          <a:fontRef idx="minor">
+            <a:schemeClr val="tx1"/>
+          </a:fontRef>
+        </p:style>
+      </p:cxnSp>
+      <p:cxnSp>
+        <p:nvCxnSpPr>
+          <p:cNvPr id="25" name="Connector 24"/>
+          <p:cNvCxnSpPr/>
+          <p:nvPr/>
+        </p:nvCxnSpPr>
+        <p:spPr>
+          <a:xfrm flipH="1">
+            <a:off x="7863840" y="5120640"/>
+            <a:ext cx="822960" cy="0"/>
+          </a:xfrm>
+          <a:prstGeom prst="line">
+            <a:avLst/>
+          </a:prstGeom>
+          <a:ln w="15875">
+            <a:solidFill>
+              <a:srgbClr val="132A46"/>
+            </a:solidFill>
+          </a:ln>
+        </p:spPr>
+        <p:style>
+          <a:lnRef idx="2">
+            <a:schemeClr val="accent1"/>
+          </a:lnRef>
+          <a:fillRef idx="0">
+            <a:schemeClr val="accent1"/>
+          </a:fillRef>
+          <a:effectRef idx="1">
+            <a:schemeClr val="accent1"/>
+          </a:effectRef>
+          <a:fontRef idx="minor">
+            <a:schemeClr val="tx1"/>
+          </a:fontRef>
+        </p:style>
+      </p:cxnSp>
+      <p:cxnSp>
+        <p:nvCxnSpPr>
+          <p:cNvPr id="26" name="Connector 25"/>
+          <p:cNvCxnSpPr/>
+          <p:nvPr/>
+        </p:nvCxnSpPr>
+        <p:spPr>
+          <a:xfrm>
+            <a:off x="7863840" y="5120640"/>
+            <a:ext cx="0" cy="251460"/>
+          </a:xfrm>
+          <a:prstGeom prst="line">
+            <a:avLst/>
+          </a:prstGeom>
+          <a:ln w="15875">
+            <a:solidFill>
+              <a:srgbClr val="132A46"/>
+            </a:solidFill>
+            <a:tailEnd type="triangle" w="med" len="med"/>
+          </a:ln>
+        </p:spPr>
+        <p:style>
+          <a:lnRef idx="2">
+            <a:schemeClr val="accent1"/>
+          </a:lnRef>
+          <a:fillRef idx="0">
+            <a:schemeClr val="accent1"/>
+          </a:fillRef>
+          <a:effectRef idx="1">
+            <a:schemeClr val="accent1"/>
+          </a:effectRef>
+          <a:fontRef idx="minor">
+            <a:schemeClr val="tx1"/>
+          </a:fontRef>
+        </p:style>
+      </p:cxnSp>
+      <p:cxnSp>
+        <p:nvCxnSpPr>
+          <p:cNvPr id="27" name="Connector 26"/>
+          <p:cNvCxnSpPr/>
+          <p:nvPr/>
+        </p:nvCxnSpPr>
+        <p:spPr>
+          <a:xfrm>
+            <a:off x="9966960" y="4251960"/>
+            <a:ext cx="457200" cy="0"/>
+          </a:xfrm>
+          <a:prstGeom prst="line">
+            <a:avLst/>
+          </a:prstGeom>
+          <a:ln w="15875">
+            <a:solidFill>
+              <a:srgbClr val="132A46"/>
+            </a:solidFill>
+            <a:prstDash val="dash"/>
+          </a:ln>
+        </p:spPr>
+        <p:style>
+          <a:lnRef idx="2">
+            <a:schemeClr val="accent1"/>
+          </a:lnRef>
+          <a:fillRef idx="0">
+            <a:schemeClr val="accent1"/>
+          </a:fillRef>
+          <a:effectRef idx="1">
+            <a:schemeClr val="accent1"/>
+          </a:effectRef>
+          <a:fontRef idx="minor">
+            <a:schemeClr val="tx1"/>
+          </a:fontRef>
+        </p:style>
+      </p:cxnSp>
+      <p:cxnSp>
+        <p:nvCxnSpPr>
+          <p:cNvPr id="28" name="Connector 27"/>
+          <p:cNvCxnSpPr/>
+          <p:nvPr/>
+        </p:nvCxnSpPr>
+        <p:spPr>
+          <a:xfrm flipV="1">
+            <a:off x="10424160" y="3246120"/>
+            <a:ext cx="0" cy="1005840"/>
+          </a:xfrm>
+          <a:prstGeom prst="line">
+            <a:avLst/>
+          </a:prstGeom>
+          <a:ln w="15875">
+            <a:solidFill>
+              <a:srgbClr val="132A46"/>
+            </a:solidFill>
+            <a:prstDash val="dash"/>
+          </a:ln>
+        </p:spPr>
+        <p:style>
+          <a:lnRef idx="2">
+            <a:schemeClr val="accent1"/>
+          </a:lnRef>
+          <a:fillRef idx="0">
+            <a:schemeClr val="accent1"/>
+          </a:fillRef>
+          <a:effectRef idx="1">
+            <a:schemeClr val="accent1"/>
+          </a:effectRef>
+          <a:fontRef idx="minor">
+            <a:schemeClr val="tx1"/>
+          </a:fontRef>
+        </p:style>
+      </p:cxnSp>
+      <p:cxnSp>
+        <p:nvCxnSpPr>
+          <p:cNvPr id="29" name="Connector 28"/>
+          <p:cNvCxnSpPr/>
+          <p:nvPr/>
+        </p:nvCxnSpPr>
+        <p:spPr>
+          <a:xfrm flipH="1">
+            <a:off x="10149840" y="3246120"/>
+            <a:ext cx="274320" cy="0"/>
+          </a:xfrm>
+          <a:prstGeom prst="line">
+            <a:avLst/>
+          </a:prstGeom>
+          <a:ln w="15875">
+            <a:solidFill>
+              <a:srgbClr val="132A46"/>
+            </a:solidFill>
+            <a:prstDash val="dash"/>
+            <a:tailEnd type="triangle" w="med" len="med"/>
+          </a:ln>
+        </p:spPr>
+        <p:style>
+          <a:lnRef idx="2">
+            <a:schemeClr val="accent1"/>
+          </a:lnRef>
+          <a:fillRef idx="0">
+            <a:schemeClr val="accent1"/>
+          </a:fillRef>
+          <a:effectRef idx="1">
+            <a:schemeClr val="accent1"/>
+          </a:effectRef>
+          <a:fontRef idx="minor">
+            <a:schemeClr val="tx1"/>
+          </a:fontRef>
+        </p:style>
+      </p:cxnSp>
+      <p:sp>
+        <p:nvSpPr>
+          <p:cNvPr id="30" name="Rectangle 29"/>
+          <p:cNvSpPr/>
+          <p:nvPr/>
+        </p:nvSpPr>
+        <p:spPr>
+          <a:xfrm>
+            <a:off x="3246120" y="2432303"/>
+            <a:ext cx="822960" cy="219456"/>
           </a:xfrm>
           <a:prstGeom prst="rect">
             <a:avLst/>
           </a:prstGeom>
-          <a:noFill/>
-        </p:spPr>
-        <p:txBody>
-          <a:bodyPr wrap="square" anchor="t" lIns="0" rIns="0" tIns="0" bIns="0">
-            <a:spAutoFit/>
-          </a:bodyPr>
-          <a:lstStyle/>
-          <a:p>
-            <a:pPr algn="l"/>
-            <a:r>
-              <a:rPr sz="1450" b="1" i="0">
+          <a:solidFill>
+            <a:srgbClr val="FFFFFF"/>
+          </a:solidFill>
+          <a:ln>
+            <a:noFill/>
+          </a:ln>
+          <a:effectLst/>
+        </p:spPr>
+        <p:style>
+          <a:lnRef idx="1">
+            <a:schemeClr val="accent1"/>
+          </a:lnRef>
+          <a:fillRef idx="3">
+            <a:schemeClr val="accent1"/>
+          </a:fillRef>
+          <a:effectRef idx="2">
+            <a:schemeClr val="accent1"/>
+          </a:effectRef>
+          <a:fontRef idx="minor">
+            <a:schemeClr val="lt1"/>
+          </a:fontRef>
+        </p:style>
+        <p:txBody>
+          <a:bodyPr rtlCol="0" anchor="ctr" lIns="0" rIns="0" tIns="0" bIns="0"/>
+          <a:lstStyle/>
+          <a:p>
+            <a:pPr algn="ctr"/>
+            <a:r>
+              <a:rPr sz="900" b="1" i="0">
                 <a:solidFill>
                   <a:srgbClr val="1A1F29"/>
                 </a:solidFill>
                 <a:latin typeface="맑은 고딕"/>
                 <a:ea typeface="맑은 고딕"/>
               </a:rPr>
-              <a:t>■  전이 함수</a:t>
-            </a:r>
-          </a:p>
-        </p:txBody>
-      </p:sp>
-      <p:graphicFrame>
-        <p:nvGraphicFramePr>
-          <p:cNvPr id="14" name="Table 13"/>
-          <p:cNvGraphicFramePr>
-            <a:graphicFrameLocks noGrp="1"/>
-          </p:cNvGraphicFramePr>
-          <p:nvPr/>
-        </p:nvGraphicFramePr>
-        <p:xfrm>
-          <a:off x="5926390" y="2011680"/>
-          <a:ext cx="5716662" cy="4261098"/>
-        </p:xfrm>
-        <a:graphic>
-          <a:graphicData uri="http://schemas.openxmlformats.org/drawingml/2006/table">
-            <a:tbl>
-              <a:tblPr firstRow="1">
-                <a:tableStyleId>{5C22544A-7EE6-4342-B048-85BDC9FD1C3A}</a:tableStyleId>
-              </a:tblPr>
-              <a:tblGrid>
-                <a:gridCol w="1772165"/>
-                <a:gridCol w="800332"/>
-                <a:gridCol w="3144165"/>
-              </a:tblGrid>
-              <a:tr h="329184">
-                <a:tc>
-                  <a:txBody>
-                    <a:bodyPr wrap="square"/>
-                    <a:lstStyle/>
-                    <a:p>
-                      <a:pPr algn="l"/>
-                      <a:r>
-                        <a:rPr sz="1150" b="1" i="0">
-                          <a:solidFill>
-                            <a:srgbClr val="FFFFFF"/>
-                          </a:solidFill>
-                          <a:latin typeface="맑은 고딕"/>
-                          <a:ea typeface="맑은 고딕"/>
-                        </a:rPr>
-                        <a:t>전이 함수</a:t>
-                      </a:r>
-                    </a:p>
-                  </a:txBody>
-                  <a:tcPr anchor="ctr" marL="73152" marR="73152" marT="27432" marB="27432">
-                    <a:solidFill>
-                      <a:srgbClr val="132A46"/>
-                    </a:solidFill>
-                    <a:lnL w="6350" cap="flat">
-                      <a:solidFill>
-                        <a:srgbClr val="DEE5EE"/>
-                      </a:solidFill>
-                    </a:lnL>
-                    <a:lnR w="6350" cap="flat">
-                      <a:solidFill>
-                        <a:srgbClr val="DEE5EE"/>
-                      </a:solidFill>
-                    </a:lnR>
-                    <a:lnT w="6350" cap="flat">
-                      <a:solidFill>
-                        <a:srgbClr val="DEE5EE"/>
-                      </a:solidFill>
-                    </a:lnT>
-                    <a:lnB w="6350" cap="flat">
-                      <a:solidFill>
-                        <a:srgbClr val="DEE5EE"/>
-                      </a:solidFill>
-                    </a:lnB>
-                  </a:tcPr>
-                </a:tc>
-                <a:tc>
-                  <a:txBody>
-                    <a:bodyPr wrap="square"/>
-                    <a:lstStyle/>
-                    <a:p>
-                      <a:pPr algn="l"/>
-                      <a:r>
-                        <a:rPr sz="1150" b="1" i="0">
-                          <a:solidFill>
-                            <a:srgbClr val="FFFFFF"/>
-                          </a:solidFill>
-                          <a:latin typeface="맑은 고딕"/>
-                          <a:ea typeface="맑은 고딕"/>
-                        </a:rPr>
-                        <a:t>역할</a:t>
-                      </a:r>
-                    </a:p>
-                  </a:txBody>
-                  <a:tcPr anchor="ctr" marL="73152" marR="73152" marT="27432" marB="27432">
-                    <a:solidFill>
-                      <a:srgbClr val="132A46"/>
-                    </a:solidFill>
-                    <a:lnL w="6350" cap="flat">
-                      <a:solidFill>
-                        <a:srgbClr val="DEE5EE"/>
-                      </a:solidFill>
-                    </a:lnL>
-                    <a:lnR w="6350" cap="flat">
-                      <a:solidFill>
-                        <a:srgbClr val="DEE5EE"/>
-                      </a:solidFill>
-                    </a:lnR>
-                    <a:lnT w="6350" cap="flat">
-                      <a:solidFill>
-                        <a:srgbClr val="DEE5EE"/>
-                      </a:solidFill>
-                    </a:lnT>
-                    <a:lnB w="6350" cap="flat">
-                      <a:solidFill>
-                        <a:srgbClr val="DEE5EE"/>
-                      </a:solidFill>
-                    </a:lnB>
-                  </a:tcPr>
-                </a:tc>
-                <a:tc>
-                  <a:txBody>
-                    <a:bodyPr wrap="square"/>
-                    <a:lstStyle/>
-                    <a:p>
-                      <a:pPr algn="l"/>
-                      <a:r>
-                        <a:rPr sz="1150" b="1" i="0">
-                          <a:solidFill>
-                            <a:srgbClr val="FFFFFF"/>
-                          </a:solidFill>
-                          <a:latin typeface="맑은 고딕"/>
-                          <a:ea typeface="맑은 고딕"/>
-                        </a:rPr>
-                        <a:t>설명</a:t>
-                      </a:r>
-                    </a:p>
-                  </a:txBody>
-                  <a:tcPr anchor="ctr" marL="73152" marR="73152" marT="27432" marB="27432">
-                    <a:solidFill>
-                      <a:srgbClr val="132A46"/>
-                    </a:solidFill>
-                    <a:lnL w="6350" cap="flat">
-                      <a:solidFill>
-                        <a:srgbClr val="DEE5EE"/>
-                      </a:solidFill>
-                    </a:lnL>
-                    <a:lnR w="6350" cap="flat">
-                      <a:solidFill>
-                        <a:srgbClr val="DEE5EE"/>
-                      </a:solidFill>
-                    </a:lnR>
-                    <a:lnT w="6350" cap="flat">
-                      <a:solidFill>
-                        <a:srgbClr val="DEE5EE"/>
-                      </a:solidFill>
-                    </a:lnT>
-                    <a:lnB w="6350" cap="flat">
-                      <a:solidFill>
-                        <a:srgbClr val="DEE5EE"/>
-                      </a:solidFill>
-                    </a:lnB>
-                  </a:tcPr>
-                </a:tc>
-              </a:tr>
-              <a:tr h="561702">
-                <a:tc>
-                  <a:txBody>
-                    <a:bodyPr wrap="square"/>
-                    <a:lstStyle/>
-                    <a:p>
-                      <a:pPr algn="l"/>
-                      <a:r>
-                        <a:rPr sz="900" b="1" i="0">
-                          <a:solidFill>
-                            <a:srgbClr val="1A1F29"/>
-                          </a:solidFill>
-                          <a:latin typeface="맑은 고딕"/>
-                          <a:ea typeface="맑은 고딕"/>
-                        </a:rPr>
-                        <a:t>decideAuto</a:t>
-                      </a:r>
-                    </a:p>
-                  </a:txBody>
-                  <a:tcPr anchor="ctr" marL="73152" marR="73152" marT="27432" marB="27432">
-                    <a:solidFill>
-                      <a:srgbClr val="FFFFFF"/>
-                    </a:solidFill>
-                    <a:lnL w="6350" cap="flat">
-                      <a:solidFill>
-                        <a:srgbClr val="DEE5EE"/>
-                      </a:solidFill>
-                    </a:lnL>
-                    <a:lnR w="6350" cap="flat">
-                      <a:solidFill>
-                        <a:srgbClr val="DEE5EE"/>
-                      </a:solidFill>
-                    </a:lnR>
-                    <a:lnT w="6350" cap="flat">
-                      <a:solidFill>
-                        <a:srgbClr val="DEE5EE"/>
-                      </a:solidFill>
-                    </a:lnT>
-                    <a:lnB w="6350" cap="flat">
-                      <a:solidFill>
-                        <a:srgbClr val="DEE5EE"/>
-                      </a:solidFill>
-                    </a:lnB>
-                  </a:tcPr>
-                </a:tc>
-                <a:tc>
-                  <a:txBody>
-                    <a:bodyPr wrap="square"/>
-                    <a:lstStyle/>
-                    <a:p>
-                      <a:pPr algn="l"/>
-                      <a:r>
-                        <a:rPr sz="900" b="0" i="0">
-                          <a:solidFill>
-                            <a:srgbClr val="1A1F29"/>
-                          </a:solidFill>
-                          <a:latin typeface="맑은 고딕"/>
-                          <a:ea typeface="맑은 고딕"/>
-                        </a:rPr>
-                        <a:t>기술팀</a:t>
-                      </a:r>
-                    </a:p>
-                  </a:txBody>
-                  <a:tcPr anchor="ctr" marL="73152" marR="73152" marT="27432" marB="27432">
-                    <a:solidFill>
-                      <a:srgbClr val="FFFFFF"/>
-                    </a:solidFill>
-                    <a:lnL w="6350" cap="flat">
-                      <a:solidFill>
-                        <a:srgbClr val="DEE5EE"/>
-                      </a:solidFill>
-                    </a:lnL>
-                    <a:lnR w="6350" cap="flat">
-                      <a:solidFill>
-                        <a:srgbClr val="DEE5EE"/>
-                      </a:solidFill>
-                    </a:lnR>
-                    <a:lnT w="6350" cap="flat">
-                      <a:solidFill>
-                        <a:srgbClr val="DEE5EE"/>
-                      </a:solidFill>
-                    </a:lnT>
-                    <a:lnB w="6350" cap="flat">
-                      <a:solidFill>
-                        <a:srgbClr val="DEE5EE"/>
-                      </a:solidFill>
-                    </a:lnB>
-                  </a:tcPr>
-                </a:tc>
-                <a:tc>
-                  <a:txBody>
-                    <a:bodyPr wrap="square"/>
-                    <a:lstStyle/>
-                    <a:p>
-                      <a:pPr algn="l"/>
-                      <a:r>
-                        <a:rPr sz="900" b="0" i="0">
-                          <a:solidFill>
-                            <a:srgbClr val="1A1F29"/>
-                          </a:solidFill>
-                          <a:latin typeface="맑은 고딕"/>
-                          <a:ea typeface="맑은 고딕"/>
-                        </a:rPr>
-                        <a:t>AUTO 질의 확인 — 특이사항 없으면 TO-BE 값 즉시 반영·해결</a:t>
-                      </a:r>
-                    </a:p>
-                  </a:txBody>
-                  <a:tcPr anchor="ctr" marL="73152" marR="73152" marT="27432" marB="27432">
-                    <a:solidFill>
-                      <a:srgbClr val="FFFFFF"/>
-                    </a:solidFill>
-                    <a:lnL w="6350" cap="flat">
-                      <a:solidFill>
-                        <a:srgbClr val="DEE5EE"/>
-                      </a:solidFill>
-                    </a:lnL>
-                    <a:lnR w="6350" cap="flat">
-                      <a:solidFill>
-                        <a:srgbClr val="DEE5EE"/>
-                      </a:solidFill>
-                    </a:lnR>
-                    <a:lnT w="6350" cap="flat">
-                      <a:solidFill>
-                        <a:srgbClr val="DEE5EE"/>
-                      </a:solidFill>
-                    </a:lnT>
-                    <a:lnB w="6350" cap="flat">
-                      <a:solidFill>
-                        <a:srgbClr val="DEE5EE"/>
-                      </a:solidFill>
-                    </a:lnB>
-                  </a:tcPr>
-                </a:tc>
-              </a:tr>
-              <a:tr h="561702">
-                <a:tc>
-                  <a:txBody>
-                    <a:bodyPr wrap="square"/>
-                    <a:lstStyle/>
-                    <a:p>
-                      <a:pPr algn="l"/>
-                      <a:r>
-                        <a:rPr sz="900" b="1" i="0">
-                          <a:solidFill>
-                            <a:srgbClr val="1A1F29"/>
-                          </a:solidFill>
-                          <a:latin typeface="맑은 고딕"/>
-                          <a:ea typeface="맑은 고딕"/>
-                        </a:rPr>
-                        <a:t>convertAutoToProposal</a:t>
-                      </a:r>
-                    </a:p>
-                  </a:txBody>
-                  <a:tcPr anchor="ctr" marL="73152" marR="73152" marT="27432" marB="27432">
-                    <a:solidFill>
-                      <a:srgbClr val="FFFFFF"/>
-                    </a:solidFill>
-                    <a:lnL w="6350" cap="flat">
-                      <a:solidFill>
-                        <a:srgbClr val="DEE5EE"/>
-                      </a:solidFill>
-                    </a:lnL>
-                    <a:lnR w="6350" cap="flat">
-                      <a:solidFill>
-                        <a:srgbClr val="DEE5EE"/>
-                      </a:solidFill>
-                    </a:lnR>
-                    <a:lnT w="6350" cap="flat">
-                      <a:solidFill>
-                        <a:srgbClr val="DEE5EE"/>
-                      </a:solidFill>
-                    </a:lnT>
-                    <a:lnB w="6350" cap="flat">
-                      <a:solidFill>
-                        <a:srgbClr val="DEE5EE"/>
-                      </a:solidFill>
-                    </a:lnB>
-                  </a:tcPr>
-                </a:tc>
-                <a:tc>
-                  <a:txBody>
-                    <a:bodyPr wrap="square"/>
-                    <a:lstStyle/>
-                    <a:p>
-                      <a:pPr algn="l"/>
-                      <a:r>
-                        <a:rPr sz="900" b="0" i="0">
-                          <a:solidFill>
-                            <a:srgbClr val="1A1F29"/>
-                          </a:solidFill>
-                          <a:latin typeface="맑은 고딕"/>
-                          <a:ea typeface="맑은 고딕"/>
-                        </a:rPr>
-                        <a:t>기술팀</a:t>
-                      </a:r>
-                    </a:p>
-                  </a:txBody>
-                  <a:tcPr anchor="ctr" marL="73152" marR="73152" marT="27432" marB="27432">
-                    <a:solidFill>
-                      <a:srgbClr val="FFFFFF"/>
-                    </a:solidFill>
-                    <a:lnL w="6350" cap="flat">
-                      <a:solidFill>
-                        <a:srgbClr val="DEE5EE"/>
-                      </a:solidFill>
-                    </a:lnL>
-                    <a:lnR w="6350" cap="flat">
-                      <a:solidFill>
-                        <a:srgbClr val="DEE5EE"/>
-                      </a:solidFill>
-                    </a:lnR>
-                    <a:lnT w="6350" cap="flat">
-                      <a:solidFill>
-                        <a:srgbClr val="DEE5EE"/>
-                      </a:solidFill>
-                    </a:lnT>
-                    <a:lnB w="6350" cap="flat">
-                      <a:solidFill>
-                        <a:srgbClr val="DEE5EE"/>
-                      </a:solidFill>
-                    </a:lnB>
-                  </a:tcPr>
-                </a:tc>
-                <a:tc>
-                  <a:txBody>
-                    <a:bodyPr wrap="square"/>
-                    <a:lstStyle/>
-                    <a:p>
-                      <a:pPr algn="l"/>
-                      <a:r>
-                        <a:rPr sz="900" b="0" i="0">
-                          <a:solidFill>
-                            <a:srgbClr val="1A1F29"/>
-                          </a:solidFill>
-                          <a:latin typeface="맑은 고딕"/>
-                          <a:ea typeface="맑은 고딕"/>
-                        </a:rPr>
-                        <a:t>AUTO 질의에 특이사항 있을 때 곧장 값 제안(VALUE_PROPOSED)으로 전환</a:t>
-                      </a:r>
-                    </a:p>
-                  </a:txBody>
-                  <a:tcPr anchor="ctr" marL="73152" marR="73152" marT="27432" marB="27432">
-                    <a:solidFill>
-                      <a:srgbClr val="FFFFFF"/>
-                    </a:solidFill>
-                    <a:lnL w="6350" cap="flat">
-                      <a:solidFill>
-                        <a:srgbClr val="DEE5EE"/>
-                      </a:solidFill>
-                    </a:lnL>
-                    <a:lnR w="6350" cap="flat">
-                      <a:solidFill>
-                        <a:srgbClr val="DEE5EE"/>
-                      </a:solidFill>
-                    </a:lnR>
-                    <a:lnT w="6350" cap="flat">
-                      <a:solidFill>
-                        <a:srgbClr val="DEE5EE"/>
-                      </a:solidFill>
-                    </a:lnT>
-                    <a:lnB w="6350" cap="flat">
-                      <a:solidFill>
-                        <a:srgbClr val="DEE5EE"/>
-                      </a:solidFill>
-                    </a:lnB>
-                  </a:tcPr>
-                </a:tc>
-              </a:tr>
-              <a:tr h="561702">
-                <a:tc>
-                  <a:txBody>
-                    <a:bodyPr wrap="square"/>
-                    <a:lstStyle/>
-                    <a:p>
-                      <a:pPr algn="l"/>
-                      <a:r>
-                        <a:rPr sz="900" b="1" i="0">
-                          <a:solidFill>
-                            <a:srgbClr val="1A1F29"/>
-                          </a:solidFill>
-                          <a:latin typeface="맑은 고딕"/>
-                          <a:ea typeface="맑은 고딕"/>
-                        </a:rPr>
-                        <a:t>quickConfirmAsIs</a:t>
-                      </a:r>
-                    </a:p>
-                  </a:txBody>
-                  <a:tcPr anchor="ctr" marL="73152" marR="73152" marT="27432" marB="27432">
-                    <a:solidFill>
-                      <a:srgbClr val="FFFFFF"/>
-                    </a:solidFill>
-                    <a:lnL w="6350" cap="flat">
-                      <a:solidFill>
-                        <a:srgbClr val="DEE5EE"/>
-                      </a:solidFill>
-                    </a:lnL>
-                    <a:lnR w="6350" cap="flat">
-                      <a:solidFill>
-                        <a:srgbClr val="DEE5EE"/>
-                      </a:solidFill>
-                    </a:lnR>
-                    <a:lnT w="6350" cap="flat">
-                      <a:solidFill>
-                        <a:srgbClr val="DEE5EE"/>
-                      </a:solidFill>
-                    </a:lnT>
-                    <a:lnB w="6350" cap="flat">
-                      <a:solidFill>
-                        <a:srgbClr val="DEE5EE"/>
-                      </a:solidFill>
-                    </a:lnB>
-                  </a:tcPr>
-                </a:tc>
-                <a:tc>
-                  <a:txBody>
-                    <a:bodyPr wrap="square"/>
-                    <a:lstStyle/>
-                    <a:p>
-                      <a:pPr algn="l"/>
-                      <a:r>
-                        <a:rPr sz="900" b="0" i="0">
-                          <a:solidFill>
-                            <a:srgbClr val="1A1F29"/>
-                          </a:solidFill>
-                          <a:latin typeface="맑은 고딕"/>
-                          <a:ea typeface="맑은 고딕"/>
-                        </a:rPr>
-                        <a:t>기술팀</a:t>
-                      </a:r>
-                    </a:p>
-                  </a:txBody>
-                  <a:tcPr anchor="ctr" marL="73152" marR="73152" marT="27432" marB="27432">
-                    <a:solidFill>
-                      <a:srgbClr val="FFFFFF"/>
-                    </a:solidFill>
-                    <a:lnL w="6350" cap="flat">
-                      <a:solidFill>
-                        <a:srgbClr val="DEE5EE"/>
-                      </a:solidFill>
-                    </a:lnL>
-                    <a:lnR w="6350" cap="flat">
-                      <a:solidFill>
-                        <a:srgbClr val="DEE5EE"/>
-                      </a:solidFill>
-                    </a:lnR>
-                    <a:lnT w="6350" cap="flat">
-                      <a:solidFill>
-                        <a:srgbClr val="DEE5EE"/>
-                      </a:solidFill>
-                    </a:lnT>
-                    <a:lnB w="6350" cap="flat">
-                      <a:solidFill>
-                        <a:srgbClr val="DEE5EE"/>
-                      </a:solidFill>
-                    </a:lnB>
-                  </a:tcPr>
-                </a:tc>
-                <a:tc>
-                  <a:txBody>
-                    <a:bodyPr wrap="square"/>
-                    <a:lstStyle/>
-                    <a:p>
-                      <a:pPr algn="l"/>
-                      <a:r>
-                        <a:rPr sz="900" b="0" i="0">
-                          <a:solidFill>
-                            <a:srgbClr val="1A1F29"/>
-                          </a:solidFill>
-                          <a:latin typeface="맑은 고딕"/>
-                          <a:ea typeface="맑은 고딕"/>
-                        </a:rPr>
-                        <a:t>MANUAL 질의에서 AS-IS 값 유지로 결정, VALUE_PROPOSED로 전환</a:t>
-                      </a:r>
-                    </a:p>
-                  </a:txBody>
-                  <a:tcPr anchor="ctr" marL="73152" marR="73152" marT="27432" marB="27432">
-                    <a:solidFill>
-                      <a:srgbClr val="FFFFFF"/>
-                    </a:solidFill>
-                    <a:lnL w="6350" cap="flat">
-                      <a:solidFill>
-                        <a:srgbClr val="DEE5EE"/>
-                      </a:solidFill>
-                    </a:lnL>
-                    <a:lnR w="6350" cap="flat">
-                      <a:solidFill>
-                        <a:srgbClr val="DEE5EE"/>
-                      </a:solidFill>
-                    </a:lnR>
-                    <a:lnT w="6350" cap="flat">
-                      <a:solidFill>
-                        <a:srgbClr val="DEE5EE"/>
-                      </a:solidFill>
-                    </a:lnT>
-                    <a:lnB w="6350" cap="flat">
-                      <a:solidFill>
-                        <a:srgbClr val="DEE5EE"/>
-                      </a:solidFill>
-                    </a:lnB>
-                  </a:tcPr>
-                </a:tc>
-              </a:tr>
-              <a:tr h="561702">
-                <a:tc>
-                  <a:txBody>
-                    <a:bodyPr wrap="square"/>
-                    <a:lstStyle/>
-                    <a:p>
-                      <a:pPr algn="l"/>
-                      <a:r>
-                        <a:rPr sz="900" b="1" i="0">
-                          <a:solidFill>
-                            <a:srgbClr val="1A1F29"/>
-                          </a:solidFill>
-                          <a:latin typeface="맑은 고딕"/>
-                          <a:ea typeface="맑은 고딕"/>
-                        </a:rPr>
-                        <a:t>proposeValue / proposeChanges</a:t>
-                      </a:r>
-                    </a:p>
-                  </a:txBody>
-                  <a:tcPr anchor="ctr" marL="73152" marR="73152" marT="27432" marB="27432">
-                    <a:solidFill>
-                      <a:srgbClr val="FFFFFF"/>
-                    </a:solidFill>
-                    <a:lnL w="6350" cap="flat">
-                      <a:solidFill>
-                        <a:srgbClr val="DEE5EE"/>
-                      </a:solidFill>
-                    </a:lnL>
-                    <a:lnR w="6350" cap="flat">
-                      <a:solidFill>
-                        <a:srgbClr val="DEE5EE"/>
-                      </a:solidFill>
-                    </a:lnR>
-                    <a:lnT w="6350" cap="flat">
-                      <a:solidFill>
-                        <a:srgbClr val="DEE5EE"/>
-                      </a:solidFill>
-                    </a:lnT>
-                    <a:lnB w="6350" cap="flat">
-                      <a:solidFill>
-                        <a:srgbClr val="DEE5EE"/>
-                      </a:solidFill>
-                    </a:lnB>
-                  </a:tcPr>
-                </a:tc>
-                <a:tc>
-                  <a:txBody>
-                    <a:bodyPr wrap="square"/>
-                    <a:lstStyle/>
-                    <a:p>
-                      <a:pPr algn="l"/>
-                      <a:r>
-                        <a:rPr sz="900" b="0" i="0">
-                          <a:solidFill>
-                            <a:srgbClr val="1A1F29"/>
-                          </a:solidFill>
-                          <a:latin typeface="맑은 고딕"/>
-                          <a:ea typeface="맑은 고딕"/>
-                        </a:rPr>
-                        <a:t>기술팀</a:t>
-                      </a:r>
-                    </a:p>
-                  </a:txBody>
-                  <a:tcPr anchor="ctr" marL="73152" marR="73152" marT="27432" marB="27432">
-                    <a:solidFill>
-                      <a:srgbClr val="FFFFFF"/>
-                    </a:solidFill>
-                    <a:lnL w="6350" cap="flat">
-                      <a:solidFill>
-                        <a:srgbClr val="DEE5EE"/>
-                      </a:solidFill>
-                    </a:lnL>
-                    <a:lnR w="6350" cap="flat">
-                      <a:solidFill>
-                        <a:srgbClr val="DEE5EE"/>
-                      </a:solidFill>
-                    </a:lnR>
-                    <a:lnT w="6350" cap="flat">
-                      <a:solidFill>
-                        <a:srgbClr val="DEE5EE"/>
-                      </a:solidFill>
-                    </a:lnT>
-                    <a:lnB w="6350" cap="flat">
-                      <a:solidFill>
-                        <a:srgbClr val="DEE5EE"/>
-                      </a:solidFill>
-                    </a:lnB>
-                  </a:tcPr>
-                </a:tc>
-                <a:tc>
-                  <a:txBody>
-                    <a:bodyPr wrap="square"/>
-                    <a:lstStyle/>
-                    <a:p>
-                      <a:pPr algn="l"/>
-                      <a:r>
-                        <a:rPr sz="900" b="0" i="0">
-                          <a:solidFill>
-                            <a:srgbClr val="1A1F29"/>
-                          </a:solidFill>
-                          <a:latin typeface="맑은 고딕"/>
-                          <a:ea typeface="맑은 고딕"/>
-                        </a:rPr>
-                        <a:t>MANUAL 질의에서 새 값(단일/다중 필드)을 제안</a:t>
-                      </a:r>
-                    </a:p>
-                  </a:txBody>
-                  <a:tcPr anchor="ctr" marL="73152" marR="73152" marT="27432" marB="27432">
-                    <a:solidFill>
-                      <a:srgbClr val="FFFFFF"/>
-                    </a:solidFill>
-                    <a:lnL w="6350" cap="flat">
-                      <a:solidFill>
-                        <a:srgbClr val="DEE5EE"/>
-                      </a:solidFill>
-                    </a:lnL>
-                    <a:lnR w="6350" cap="flat">
-                      <a:solidFill>
-                        <a:srgbClr val="DEE5EE"/>
-                      </a:solidFill>
-                    </a:lnR>
-                    <a:lnT w="6350" cap="flat">
-                      <a:solidFill>
-                        <a:srgbClr val="DEE5EE"/>
-                      </a:solidFill>
-                    </a:lnT>
-                    <a:lnB w="6350" cap="flat">
-                      <a:solidFill>
-                        <a:srgbClr val="DEE5EE"/>
-                      </a:solidFill>
-                    </a:lnB>
-                  </a:tcPr>
-                </a:tc>
-              </a:tr>
-              <a:tr h="561702">
-                <a:tc>
-                  <a:txBody>
-                    <a:bodyPr wrap="square"/>
-                    <a:lstStyle/>
-                    <a:p>
-                      <a:pPr algn="l"/>
-                      <a:r>
-                        <a:rPr sz="900" b="1" i="0">
-                          <a:solidFill>
-                            <a:srgbClr val="1A1F29"/>
-                          </a:solidFill>
-                          <a:latin typeface="맑은 고딕"/>
-                          <a:ea typeface="맑은 고딕"/>
-                        </a:rPr>
-                        <a:t>decideFinal</a:t>
-                      </a:r>
-                    </a:p>
-                  </a:txBody>
-                  <a:tcPr anchor="ctr" marL="73152" marR="73152" marT="27432" marB="27432">
-                    <a:solidFill>
-                      <a:srgbClr val="FFFFFF"/>
-                    </a:solidFill>
-                    <a:lnL w="6350" cap="flat">
-                      <a:solidFill>
-                        <a:srgbClr val="DEE5EE"/>
-                      </a:solidFill>
-                    </a:lnL>
-                    <a:lnR w="6350" cap="flat">
-                      <a:solidFill>
-                        <a:srgbClr val="DEE5EE"/>
-                      </a:solidFill>
-                    </a:lnR>
-                    <a:lnT w="6350" cap="flat">
-                      <a:solidFill>
-                        <a:srgbClr val="DEE5EE"/>
-                      </a:solidFill>
-                    </a:lnT>
-                    <a:lnB w="6350" cap="flat">
-                      <a:solidFill>
-                        <a:srgbClr val="DEE5EE"/>
-                      </a:solidFill>
-                    </a:lnB>
-                  </a:tcPr>
-                </a:tc>
-                <a:tc>
-                  <a:txBody>
-                    <a:bodyPr wrap="square"/>
-                    <a:lstStyle/>
-                    <a:p>
-                      <a:pPr algn="l"/>
-                      <a:r>
-                        <a:rPr sz="900" b="0" i="0">
-                          <a:solidFill>
-                            <a:srgbClr val="1A1F29"/>
-                          </a:solidFill>
-                          <a:latin typeface="맑은 고딕"/>
-                          <a:ea typeface="맑은 고딕"/>
-                        </a:rPr>
-                        <a:t>설계사</a:t>
-                      </a:r>
-                    </a:p>
-                  </a:txBody>
-                  <a:tcPr anchor="ctr" marL="73152" marR="73152" marT="27432" marB="27432">
-                    <a:solidFill>
-                      <a:srgbClr val="FFFFFF"/>
-                    </a:solidFill>
-                    <a:lnL w="6350" cap="flat">
-                      <a:solidFill>
-                        <a:srgbClr val="DEE5EE"/>
-                      </a:solidFill>
-                    </a:lnL>
-                    <a:lnR w="6350" cap="flat">
-                      <a:solidFill>
-                        <a:srgbClr val="DEE5EE"/>
-                      </a:solidFill>
-                    </a:lnR>
-                    <a:lnT w="6350" cap="flat">
-                      <a:solidFill>
-                        <a:srgbClr val="DEE5EE"/>
-                      </a:solidFill>
-                    </a:lnT>
-                    <a:lnB w="6350" cap="flat">
-                      <a:solidFill>
-                        <a:srgbClr val="DEE5EE"/>
-                      </a:solidFill>
-                    </a:lnB>
-                  </a:tcPr>
-                </a:tc>
-                <a:tc>
-                  <a:txBody>
-                    <a:bodyPr wrap="square"/>
-                    <a:lstStyle/>
-                    <a:p>
-                      <a:pPr algn="l"/>
-                      <a:r>
-                        <a:rPr sz="900" b="0" i="0">
-                          <a:solidFill>
-                            <a:srgbClr val="1A1F29"/>
-                          </a:solidFill>
-                          <a:latin typeface="맑은 고딕"/>
-                          <a:ea typeface="맑은 고딕"/>
-                        </a:rPr>
-                        <a:t>값 제안에 대한 최종 확인 — 승인 시 RESOLVED, 반려 시 재질의</a:t>
-                      </a:r>
-                    </a:p>
-                  </a:txBody>
-                  <a:tcPr anchor="ctr" marL="73152" marR="73152" marT="27432" marB="27432">
-                    <a:solidFill>
-                      <a:srgbClr val="FFFFFF"/>
-                    </a:solidFill>
-                    <a:lnL w="6350" cap="flat">
-                      <a:solidFill>
-                        <a:srgbClr val="DEE5EE"/>
-                      </a:solidFill>
-                    </a:lnL>
-                    <a:lnR w="6350" cap="flat">
-                      <a:solidFill>
-                        <a:srgbClr val="DEE5EE"/>
-                      </a:solidFill>
-                    </a:lnR>
-                    <a:lnT w="6350" cap="flat">
-                      <a:solidFill>
-                        <a:srgbClr val="DEE5EE"/>
-                      </a:solidFill>
-                    </a:lnT>
-                    <a:lnB w="6350" cap="flat">
-                      <a:solidFill>
-                        <a:srgbClr val="DEE5EE"/>
-                      </a:solidFill>
-                    </a:lnB>
-                  </a:tcPr>
-                </a:tc>
-              </a:tr>
-              <a:tr h="561702">
-                <a:tc>
-                  <a:txBody>
-                    <a:bodyPr wrap="square"/>
-                    <a:lstStyle/>
-                    <a:p>
-                      <a:pPr algn="l"/>
-                      <a:r>
-                        <a:rPr sz="900" b="1" i="0">
-                          <a:solidFill>
-                            <a:srgbClr val="1A1F29"/>
-                          </a:solidFill>
-                          <a:latin typeface="맑은 고딕"/>
-                          <a:ea typeface="맑은 고딕"/>
-                        </a:rPr>
-                        <a:t>submitNarrativeAnswer</a:t>
-                      </a:r>
-                    </a:p>
-                  </a:txBody>
-                  <a:tcPr anchor="ctr" marL="73152" marR="73152" marT="27432" marB="27432">
-                    <a:solidFill>
-                      <a:srgbClr val="FFFFFF"/>
-                    </a:solidFill>
-                    <a:lnL w="6350" cap="flat">
-                      <a:solidFill>
-                        <a:srgbClr val="DEE5EE"/>
-                      </a:solidFill>
-                    </a:lnL>
-                    <a:lnR w="6350" cap="flat">
-                      <a:solidFill>
-                        <a:srgbClr val="DEE5EE"/>
-                      </a:solidFill>
-                    </a:lnR>
-                    <a:lnT w="6350" cap="flat">
-                      <a:solidFill>
-                        <a:srgbClr val="DEE5EE"/>
-                      </a:solidFill>
-                    </a:lnT>
-                    <a:lnB w="6350" cap="flat">
-                      <a:solidFill>
-                        <a:srgbClr val="DEE5EE"/>
-                      </a:solidFill>
-                    </a:lnB>
-                  </a:tcPr>
-                </a:tc>
-                <a:tc>
-                  <a:txBody>
-                    <a:bodyPr wrap="square"/>
-                    <a:lstStyle/>
-                    <a:p>
-                      <a:pPr algn="l"/>
-                      <a:r>
-                        <a:rPr sz="900" b="0" i="0">
-                          <a:solidFill>
-                            <a:srgbClr val="1A1F29"/>
-                          </a:solidFill>
-                          <a:latin typeface="맑은 고딕"/>
-                          <a:ea typeface="맑은 고딕"/>
-                        </a:rPr>
-                        <a:t>기술팀</a:t>
-                      </a:r>
-                    </a:p>
-                  </a:txBody>
-                  <a:tcPr anchor="ctr" marL="73152" marR="73152" marT="27432" marB="27432">
-                    <a:solidFill>
-                      <a:srgbClr val="FFFFFF"/>
-                    </a:solidFill>
-                    <a:lnL w="6350" cap="flat">
-                      <a:solidFill>
-                        <a:srgbClr val="DEE5EE"/>
-                      </a:solidFill>
-                    </a:lnL>
-                    <a:lnR w="6350" cap="flat">
-                      <a:solidFill>
-                        <a:srgbClr val="DEE5EE"/>
-                      </a:solidFill>
-                    </a:lnR>
-                    <a:lnT w="6350" cap="flat">
-                      <a:solidFill>
-                        <a:srgbClr val="DEE5EE"/>
-                      </a:solidFill>
-                    </a:lnT>
-                    <a:lnB w="6350" cap="flat">
-                      <a:solidFill>
-                        <a:srgbClr val="DEE5EE"/>
-                      </a:solidFill>
-                    </a:lnB>
-                  </a:tcPr>
-                </a:tc>
-                <a:tc>
-                  <a:txBody>
-                    <a:bodyPr wrap="square"/>
-                    <a:lstStyle/>
-                    <a:p>
-                      <a:pPr algn="l"/>
-                      <a:r>
-                        <a:rPr sz="900" b="0" i="0">
-                          <a:solidFill>
-                            <a:srgbClr val="1A1F29"/>
-                          </a:solidFill>
-                          <a:latin typeface="맑은 고딕"/>
-                          <a:ea typeface="맑은 고딕"/>
-                        </a:rPr>
-                        <a:t>NON_SPEC 질의 서술형 답변 등록(ANSWERED로 전환)</a:t>
-                      </a:r>
-                    </a:p>
-                  </a:txBody>
-                  <a:tcPr anchor="ctr" marL="73152" marR="73152" marT="27432" marB="27432">
-                    <a:solidFill>
-                      <a:srgbClr val="FFFFFF"/>
-                    </a:solidFill>
-                    <a:lnL w="6350" cap="flat">
-                      <a:solidFill>
-                        <a:srgbClr val="DEE5EE"/>
-                      </a:solidFill>
-                    </a:lnL>
-                    <a:lnR w="6350" cap="flat">
-                      <a:solidFill>
-                        <a:srgbClr val="DEE5EE"/>
-                      </a:solidFill>
-                    </a:lnR>
-                    <a:lnT w="6350" cap="flat">
-                      <a:solidFill>
-                        <a:srgbClr val="DEE5EE"/>
-                      </a:solidFill>
-                    </a:lnT>
-                    <a:lnB w="6350" cap="flat">
-                      <a:solidFill>
-                        <a:srgbClr val="DEE5EE"/>
-                      </a:solidFill>
-                    </a:lnB>
-                  </a:tcPr>
-                </a:tc>
-              </a:tr>
-              <a:tr h="561702">
-                <a:tc>
-                  <a:txBody>
-                    <a:bodyPr wrap="square"/>
-                    <a:lstStyle/>
-                    <a:p>
-                      <a:pPr algn="l"/>
-                      <a:r>
-                        <a:rPr sz="900" b="1" i="0">
-                          <a:solidFill>
-                            <a:srgbClr val="1A1F29"/>
-                          </a:solidFill>
-                          <a:latin typeface="맑은 고딕"/>
-                          <a:ea typeface="맑은 고딕"/>
-                        </a:rPr>
-                        <a:t>decideNarrativeAnswer</a:t>
-                      </a:r>
-                    </a:p>
-                  </a:txBody>
-                  <a:tcPr anchor="ctr" marL="73152" marR="73152" marT="27432" marB="27432">
-                    <a:solidFill>
-                      <a:srgbClr val="FFFFFF"/>
-                    </a:solidFill>
-                    <a:lnL w="6350" cap="flat">
-                      <a:solidFill>
-                        <a:srgbClr val="DEE5EE"/>
-                      </a:solidFill>
-                    </a:lnL>
-                    <a:lnR w="6350" cap="flat">
-                      <a:solidFill>
-                        <a:srgbClr val="DEE5EE"/>
-                      </a:solidFill>
-                    </a:lnR>
-                    <a:lnT w="6350" cap="flat">
-                      <a:solidFill>
-                        <a:srgbClr val="DEE5EE"/>
-                      </a:solidFill>
-                    </a:lnT>
-                    <a:lnB w="6350" cap="flat">
-                      <a:solidFill>
-                        <a:srgbClr val="DEE5EE"/>
-                      </a:solidFill>
-                    </a:lnB>
-                  </a:tcPr>
-                </a:tc>
-                <a:tc>
-                  <a:txBody>
-                    <a:bodyPr wrap="square"/>
-                    <a:lstStyle/>
-                    <a:p>
-                      <a:pPr algn="l"/>
-                      <a:r>
-                        <a:rPr sz="900" b="0" i="0">
-                          <a:solidFill>
-                            <a:srgbClr val="1A1F29"/>
-                          </a:solidFill>
-                          <a:latin typeface="맑은 고딕"/>
-                          <a:ea typeface="맑은 고딕"/>
-                        </a:rPr>
-                        <a:t>설계사</a:t>
-                      </a:r>
-                    </a:p>
-                  </a:txBody>
-                  <a:tcPr anchor="ctr" marL="73152" marR="73152" marT="27432" marB="27432">
-                    <a:solidFill>
-                      <a:srgbClr val="FFFFFF"/>
-                    </a:solidFill>
-                    <a:lnL w="6350" cap="flat">
-                      <a:solidFill>
-                        <a:srgbClr val="DEE5EE"/>
-                      </a:solidFill>
-                    </a:lnL>
-                    <a:lnR w="6350" cap="flat">
-                      <a:solidFill>
-                        <a:srgbClr val="DEE5EE"/>
-                      </a:solidFill>
-                    </a:lnR>
-                    <a:lnT w="6350" cap="flat">
-                      <a:solidFill>
-                        <a:srgbClr val="DEE5EE"/>
-                      </a:solidFill>
-                    </a:lnT>
-                    <a:lnB w="6350" cap="flat">
-                      <a:solidFill>
-                        <a:srgbClr val="DEE5EE"/>
-                      </a:solidFill>
-                    </a:lnB>
-                  </a:tcPr>
-                </a:tc>
-                <a:tc>
-                  <a:txBody>
-                    <a:bodyPr wrap="square"/>
-                    <a:lstStyle/>
-                    <a:p>
-                      <a:pPr algn="l"/>
-                      <a:r>
-                        <a:rPr sz="900" b="0" i="0">
-                          <a:solidFill>
-                            <a:srgbClr val="1A1F29"/>
-                          </a:solidFill>
-                          <a:latin typeface="맑은 고딕"/>
-                          <a:ea typeface="맑은 고딕"/>
-                        </a:rPr>
-                        <a:t>서술형 답변 최종검증 — 이상 없으면 RESOLVED, 있으면 재질의</a:t>
-                      </a:r>
-                    </a:p>
-                  </a:txBody>
-                  <a:tcPr anchor="ctr" marL="73152" marR="73152" marT="27432" marB="27432">
-                    <a:solidFill>
-                      <a:srgbClr val="FFFFFF"/>
-                    </a:solidFill>
-                    <a:lnL w="6350" cap="flat">
-                      <a:solidFill>
-                        <a:srgbClr val="DEE5EE"/>
-                      </a:solidFill>
-                    </a:lnL>
-                    <a:lnR w="6350" cap="flat">
-                      <a:solidFill>
-                        <a:srgbClr val="DEE5EE"/>
-                      </a:solidFill>
-                    </a:lnR>
-                    <a:lnT w="6350" cap="flat">
-                      <a:solidFill>
-                        <a:srgbClr val="DEE5EE"/>
-                      </a:solidFill>
-                    </a:lnT>
-                    <a:lnB w="6350" cap="flat">
-                      <a:solidFill>
-                        <a:srgbClr val="DEE5EE"/>
-                      </a:solidFill>
-                    </a:lnB>
-                  </a:tcPr>
-                </a:tc>
-              </a:tr>
-            </a:tbl>
-          </a:graphicData>
-        </a:graphic>
-      </p:graphicFrame>
+              <a:t>예</a:t>
+            </a:r>
+          </a:p>
+        </p:txBody>
+      </p:sp>
+      <p:sp>
+        <p:nvSpPr>
+          <p:cNvPr id="31" name="Rectangle 30"/>
+          <p:cNvSpPr/>
+          <p:nvPr/>
+        </p:nvSpPr>
+        <p:spPr>
+          <a:xfrm>
+            <a:off x="7543800" y="2432303"/>
+            <a:ext cx="822960" cy="219456"/>
+          </a:xfrm>
+          <a:prstGeom prst="rect">
+            <a:avLst/>
+          </a:prstGeom>
+          <a:solidFill>
+            <a:srgbClr val="FFFFFF"/>
+          </a:solidFill>
+          <a:ln>
+            <a:noFill/>
+          </a:ln>
+          <a:effectLst/>
+        </p:spPr>
+        <p:style>
+          <a:lnRef idx="1">
+            <a:schemeClr val="accent1"/>
+          </a:lnRef>
+          <a:fillRef idx="3">
+            <a:schemeClr val="accent1"/>
+          </a:fillRef>
+          <a:effectRef idx="2">
+            <a:schemeClr val="accent1"/>
+          </a:effectRef>
+          <a:fontRef idx="minor">
+            <a:schemeClr val="lt1"/>
+          </a:fontRef>
+        </p:style>
+        <p:txBody>
+          <a:bodyPr rtlCol="0" anchor="ctr" lIns="0" rIns="0" tIns="0" bIns="0"/>
+          <a:lstStyle/>
+          <a:p>
+            <a:pPr algn="ctr"/>
+            <a:r>
+              <a:rPr sz="900" b="1" i="0">
+                <a:solidFill>
+                  <a:srgbClr val="1A1F29"/>
+                </a:solidFill>
+                <a:latin typeface="맑은 고딕"/>
+                <a:ea typeface="맑은 고딕"/>
+              </a:rPr>
+              <a:t>아니오</a:t>
+            </a:r>
+          </a:p>
+        </p:txBody>
+      </p:sp>
+      <p:sp>
+        <p:nvSpPr>
+          <p:cNvPr id="32" name="Rectangle 31"/>
+          <p:cNvSpPr/>
+          <p:nvPr/>
+        </p:nvSpPr>
+        <p:spPr>
+          <a:xfrm>
+            <a:off x="8412480" y="4809744"/>
+            <a:ext cx="548640" cy="182880"/>
+          </a:xfrm>
+          <a:prstGeom prst="rect">
+            <a:avLst/>
+          </a:prstGeom>
+          <a:solidFill>
+            <a:srgbClr val="FFFFFF"/>
+          </a:solidFill>
+          <a:ln>
+            <a:noFill/>
+          </a:ln>
+          <a:effectLst/>
+        </p:spPr>
+        <p:style>
+          <a:lnRef idx="1">
+            <a:schemeClr val="accent1"/>
+          </a:lnRef>
+          <a:fillRef idx="3">
+            <a:schemeClr val="accent1"/>
+          </a:fillRef>
+          <a:effectRef idx="2">
+            <a:schemeClr val="accent1"/>
+          </a:effectRef>
+          <a:fontRef idx="minor">
+            <a:schemeClr val="lt1"/>
+          </a:fontRef>
+        </p:style>
+        <p:txBody>
+          <a:bodyPr rtlCol="0" anchor="ctr" lIns="0" rIns="0" tIns="0" bIns="0"/>
+          <a:lstStyle/>
+          <a:p>
+            <a:pPr algn="ctr"/>
+            <a:r>
+              <a:rPr sz="900" b="1" i="0">
+                <a:solidFill>
+                  <a:srgbClr val="1A1F29"/>
+                </a:solidFill>
+                <a:latin typeface="맑은 고딕"/>
+                <a:ea typeface="맑은 고딕"/>
+              </a:rPr>
+              <a:t>예</a:t>
+            </a:r>
+          </a:p>
+        </p:txBody>
+      </p:sp>
+      <p:sp>
+        <p:nvSpPr>
+          <p:cNvPr id="33" name="Rectangle 32"/>
+          <p:cNvSpPr/>
+          <p:nvPr/>
+        </p:nvSpPr>
+        <p:spPr>
+          <a:xfrm>
+            <a:off x="10058400" y="3648456"/>
+            <a:ext cx="731520" cy="201168"/>
+          </a:xfrm>
+          <a:prstGeom prst="rect">
+            <a:avLst/>
+          </a:prstGeom>
+          <a:solidFill>
+            <a:srgbClr val="FFFFFF"/>
+          </a:solidFill>
+          <a:ln>
+            <a:noFill/>
+          </a:ln>
+          <a:effectLst/>
+        </p:spPr>
+        <p:style>
+          <a:lnRef idx="1">
+            <a:schemeClr val="accent1"/>
+          </a:lnRef>
+          <a:fillRef idx="3">
+            <a:schemeClr val="accent1"/>
+          </a:fillRef>
+          <a:effectRef idx="2">
+            <a:schemeClr val="accent1"/>
+          </a:effectRef>
+          <a:fontRef idx="minor">
+            <a:schemeClr val="lt1"/>
+          </a:fontRef>
+        </p:style>
+        <p:txBody>
+          <a:bodyPr rtlCol="0" anchor="ctr" lIns="0" rIns="0" tIns="0" bIns="0"/>
+          <a:lstStyle/>
+          <a:p>
+            <a:pPr algn="ctr"/>
+            <a:r>
+              <a:rPr sz="900" b="1" i="0">
+                <a:solidFill>
+                  <a:srgbClr val="1A1F29"/>
+                </a:solidFill>
+                <a:latin typeface="맑은 고딕"/>
+                <a:ea typeface="맑은 고딕"/>
+              </a:rPr>
+              <a:t>반려</a:t>
+            </a:r>
+          </a:p>
+        </p:txBody>
+      </p:sp>
     </p:spTree>
   </p:cSld>
   <p:clrMapOvr>
@@ -13019,7 +12879,7 @@
                 <a:latin typeface="맑은 고딕"/>
                 <a:ea typeface="맑은 고딕"/>
               </a:rPr>
-              <a:t>역할별 권한 범위와 공유 DB 컬렉션</a:t>
+              <a:t>역할별 권한 범위와 공유 데이터 구성</a:t>
             </a:r>
           </a:p>
         </p:txBody>
@@ -13314,8 +13174,7 @@
                           <a:latin typeface="맑은 고딕"/>
                           <a:ea typeface="맑은 고딕"/>
                         </a:rPr>
-                        <a:t>관리자
-(ADMIN)</a:t>
+                        <a:t>관리자</a:t>
                       </a:r>
                     </a:p>
                   </a:txBody>
@@ -13405,8 +13264,7 @@
                           <a:latin typeface="맑은 고딕"/>
                           <a:ea typeface="맑은 고딕"/>
                         </a:rPr>
-                        <a:t>기술팀 담당자
-(TECH_LEAD)</a:t>
+                        <a:t>기술팀 담당자</a:t>
                       </a:r>
                     </a:p>
                   </a:txBody>
@@ -13496,8 +13354,7 @@
                           <a:latin typeface="맑은 고딕"/>
                           <a:ea typeface="맑은 고딕"/>
                         </a:rPr>
-                        <a:t>건설팀 담당자
-(CONSTRUCTION_LEAD)</a:t>
+                        <a:t>건설팀 담당자</a:t>
                       </a:r>
                     </a:p>
                   </a:txBody>
@@ -13587,8 +13444,7 @@
                           <a:latin typeface="맑은 고딕"/>
                           <a:ea typeface="맑은 고딕"/>
                         </a:rPr>
-                        <a:t>설계사
-(DESIGNER)</a:t>
+                        <a:t>설계사</a:t>
                       </a:r>
                     </a:p>
                   </a:txBody>
@@ -13733,7 +13589,7 @@
                 <a:latin typeface="맑은 고딕"/>
                 <a:ea typeface="맑은 고딕"/>
               </a:rPr>
-              <a:t>■  공유 DB 컬렉션</a:t>
+              <a:t>■  공유 데이터 구성</a:t>
             </a:r>
           </a:p>
         </p:txBody>
@@ -13775,7 +13631,7 @@
                           <a:latin typeface="맑은 고딕"/>
                           <a:ea typeface="맑은 고딕"/>
                         </a:rPr>
-                        <a:t>컬렉션</a:t>
+                        <a:t>데이터</a:t>
                       </a:r>
                     </a:p>
                   </a:txBody>
@@ -13865,7 +13721,7 @@
                           <a:latin typeface="맑은 고딕"/>
                           <a:ea typeface="맑은 고딕"/>
                         </a:rPr>
-                        <a:t>owners</a:t>
+                        <a:t>사용자 정보</a:t>
                       </a:r>
                     </a:p>
                   </a:txBody>
@@ -13909,7 +13765,7 @@
                           <a:latin typeface="맑은 고딕"/>
                           <a:ea typeface="맑은 고딕"/>
                         </a:rPr>
-                        <a:t>사용자(역할, 담당 대공정/공종)</a:t>
+                        <a:t>역할, 담당 대공정 · 공종</a:t>
                       </a:r>
                     </a:p>
                   </a:txBody>
@@ -13955,7 +13811,7 @@
                           <a:latin typeface="맑은 고딕"/>
                           <a:ea typeface="맑은 고딕"/>
                         </a:rPr>
-                        <a:t>spec_sheets</a:t>
+                        <a:t>제원표</a:t>
                       </a:r>
                     </a:p>
                   </a:txBody>
@@ -13999,7 +13855,7 @@
                           <a:latin typeface="맑은 고딕"/>
                           <a:ea typeface="맑은 고딕"/>
                         </a:rPr>
-                        <a:t>건설코드별 제원표(항목, 버전 이력, 적용 상태)</a:t>
+                        <a:t>건설코드별 항목, 버전 이력, 적용 상태</a:t>
                       </a:r>
                     </a:p>
                   </a:txBody>
@@ -14045,7 +13901,7 @@
                           <a:latin typeface="맑은 고딕"/>
                           <a:ea typeface="맑은 고딕"/>
                         </a:rPr>
-                        <a:t>qa_threads</a:t>
+                        <a:t>질의 스레드</a:t>
                       </a:r>
                     </a:p>
                   </a:txBody>
@@ -14089,7 +13945,7 @@
                           <a:latin typeface="맑은 고딕"/>
                           <a:ea typeface="맑은 고딕"/>
                         </a:rPr>
-                        <a:t>질의 스레드(상태, 대상, 메시지, 재질의 횟수)</a:t>
+                        <a:t>상태, 대상, 메시지, 재질의 횟수</a:t>
                       </a:r>
                     </a:p>
                   </a:txBody>
@@ -14135,7 +13991,7 @@
                           <a:latin typeface="맑은 고딕"/>
                           <a:ea typeface="맑은 고딕"/>
                         </a:rPr>
-                        <a:t>corrections</a:t>
+                        <a:t>수정 이력</a:t>
                       </a:r>
                     </a:p>
                   </a:txBody>
@@ -14179,7 +14035,7 @@
                           <a:latin typeface="맑은 고딕"/>
                           <a:ea typeface="맑은 고딕"/>
                         </a:rPr>
-                        <a:t>필드별 변경 이력(이전값→이후값, 출처, 처리자)</a:t>
+                        <a:t>필드별 변경 내역(이전값→이후값, 출처, 처리자)</a:t>
                       </a:r>
                     </a:p>
                   </a:txBody>
@@ -14225,7 +14081,7 @@
                           <a:latin typeface="맑은 고딕"/>
                           <a:ea typeface="맑은 고딕"/>
                         </a:rPr>
-                        <a:t>spec_entry_requests</a:t>
+                        <a:t>제원 수기입력 요청</a:t>
                       </a:r>
                     </a:p>
                   </a:txBody>
@@ -14269,7 +14125,7 @@
                           <a:latin typeface="맑은 고딕"/>
                           <a:ea typeface="맑은 고딕"/>
                         </a:rPr>
-                        <a:t>제원 수기입력 승인 대기/이력</a:t>
+                        <a:t>승인 대기 / 처리 이력</a:t>
                       </a:r>
                     </a:p>
                   </a:txBody>
@@ -14315,7 +14171,7 @@
                           <a:latin typeface="맑은 고딕"/>
                           <a:ea typeface="맑은 고딕"/>
                         </a:rPr>
-                        <a:t>guide_config</a:t>
+                        <a:t>업무 가이드 설정</a:t>
                       </a:r>
                     </a:p>
                   </a:txBody>
@@ -14359,7 +14215,7 @@
                           <a:latin typeface="맑은 고딕"/>
                           <a:ea typeface="맑은 고딕"/>
                         </a:rPr>
-                        <a:t>업무 가이드 플로우차트 문구 · 단계 설명(관리자 편집)</a:t>
+                        <a:t>플로우차트 문구 · 단계 설명(관리자 편집)</a:t>
                       </a:r>
                     </a:p>
                   </a:txBody>
@@ -14465,7 +14321,7 @@
                 <a:latin typeface="맑은 고딕"/>
                 <a:ea typeface="맑은 고딕"/>
               </a:rPr>
-              <a:t>위 6개 컬렉션 중 하나라도 값이 바뀌면 대시보드 · 질의응답 · 제원 DB 등 모든 탭이 캐시 없이 즉시 다시 계산되어 반영된다 — 여러 사용자가 같은 화면을 동시에 열어도 항상 같은 최신 상태를 본다.</a:t>
+              <a:t>위 공유 데이터 중 하나라도 값이 바뀌면 대시보드 · 질의응답 · 제원 DB 등 모든 탭이 캐시 없이 즉시 다시 계산되어 반영된다 — 여러 사용자가 같은 화면을 동시에 열어도 항상 같은 최신 상태를 본다.</a:t>
             </a:r>
           </a:p>
         </p:txBody>

--- a/demo/spec-qa-workflow-dev-briefing.pptx
+++ b/demo/spec-qa-workflow-dev-briefing.pptx
@@ -7992,7 +7992,7 @@
                           <a:latin typeface="맑은 고딕"/>
                           <a:ea typeface="맑은 고딕"/>
                         </a:rPr>
-                        <a:t>대공정별 제원 총량 집계 요약, GCS 종수 등 핵심 지표 확인</a:t>
+                        <a:t>대공정별 총량 집계 요약, GCS 종수 확인 + PJT 추이를 꺾은선그래프로 확인(성상명 · 자재명별 보기 전환 가능)</a:t>
                       </a:r>
                     </a:p>
                   </a:txBody>

--- a/demo/spec-qa-workflow-dev-briefing.pptx
+++ b/demo/spec-qa-workflow-dev-briefing.pptx
@@ -7858,7 +7858,7 @@
                           <a:latin typeface="맑은 고딕"/>
                           <a:ea typeface="맑은 고딕"/>
                         </a:rPr>
-                        <a:t>행 · 열 · 값 · 집계를 선택해 제원 데이터를 표와 그래프로 즉시 생성, 엑셀 · PNG 다운로드</a:t>
+                        <a:t>행 · 열 · 값 · 집계를 선택해 제원 데이터를 표와 그래프로 즉시 생성(성질 분류 기준 포함), 엑셀 · PNG 다운로드</a:t>
                       </a:r>
                     </a:p>
                   </a:txBody>
@@ -7992,7 +7992,7 @@
                           <a:latin typeface="맑은 고딕"/>
                           <a:ea typeface="맑은 고딕"/>
                         </a:rPr>
-                        <a:t>대공정별 총량 집계 요약, GCS 종수 확인 + PJT 추이를 꺾은선그래프로 확인(성상명 · 자재명별 보기 전환 가능)</a:t>
+                        <a:t>대공정별 총량 집계 + 자재 성질별(독가연성 · ACID 등) 집계 · 분류표 다운로드, GCS 종수 · PJT 추이 확인</a:t>
                       </a:r>
                     </a:p>
                   </a:txBody>
@@ -8598,7 +8598,7 @@
                           <a:latin typeface="맑은 고딕"/>
                           <a:ea typeface="맑은 고딕"/>
                         </a:rPr>
-                        <a:t>제원 질의 목록 확인, 답변 · 값 제안 · 최종확인 처리(자동 · 수동 질의)</a:t>
+                        <a:t>제원 질의 목록 확인, 답변 · 값 제안 · 최종확인 처리(자동 · 수동 질의, 신규 자재 성질 분류 문의 자동 생성 포함)</a:t>
                       </a:r>
                     </a:p>
                   </a:txBody>
